--- a/RTS 포트폴리오/이창하_RTS_포트폴리오.pptx
+++ b/RTS 포트폴리오/이창하_RTS_포트폴리오.pptx
@@ -5,24 +5,23 @@
     <p:sldMasterId id="2147483673" r:id="rId1"/>
   </p:sldMasterIdLst>
   <p:notesMasterIdLst>
-    <p:notesMasterId r:id="rId14"/>
+    <p:notesMasterId r:id="rId13"/>
   </p:notesMasterIdLst>
   <p:handoutMasterIdLst>
-    <p:handoutMasterId r:id="rId15"/>
+    <p:handoutMasterId r:id="rId14"/>
   </p:handoutMasterIdLst>
   <p:sldIdLst>
     <p:sldId id="257" r:id="rId2"/>
     <p:sldId id="261" r:id="rId3"/>
-    <p:sldId id="262" r:id="rId4"/>
-    <p:sldId id="280" r:id="rId5"/>
-    <p:sldId id="289" r:id="rId6"/>
-    <p:sldId id="283" r:id="rId7"/>
-    <p:sldId id="284" r:id="rId8"/>
-    <p:sldId id="285" r:id="rId9"/>
-    <p:sldId id="286" r:id="rId10"/>
-    <p:sldId id="288" r:id="rId11"/>
-    <p:sldId id="287" r:id="rId12"/>
-    <p:sldId id="279" r:id="rId13"/>
+    <p:sldId id="290" r:id="rId4"/>
+    <p:sldId id="262" r:id="rId5"/>
+    <p:sldId id="280" r:id="rId6"/>
+    <p:sldId id="289" r:id="rId7"/>
+    <p:sldId id="283" r:id="rId8"/>
+    <p:sldId id="284" r:id="rId9"/>
+    <p:sldId id="291" r:id="rId10"/>
+    <p:sldId id="287" r:id="rId11"/>
+    <p:sldId id="279" r:id="rId12"/>
   </p:sldIdLst>
   <p:sldSz cx="12192000" cy="6858000"/>
   <p:notesSz cx="6858000" cy="9144000"/>
@@ -3511,7 +3510,7 @@
             <a:pPr rtl="0"/>
             <a:fld id="{8F839092-15F8-4C72-A6BC-E11C1D12CDAA}" type="datetime1">
               <a:rPr lang="ko-KR" altLang="en-US" smtClean="0"/>
-              <a:t>2025-09-02</a:t>
+              <a:t>2025-09-03</a:t>
             </a:fld>
             <a:endParaRPr lang="en-US"/>
           </a:p>
@@ -3681,7 +3680,7 @@
             <a:pPr rtl="0"/>
             <a:fld id="{B834EDFF-C18C-466F-B693-08283F9FE7CF}" type="datetime1">
               <a:rPr lang="ko-KR" altLang="en-US" smtClean="0"/>
-              <a:t>2025-09-02</a:t>
+              <a:t>2025-09-03</a:t>
             </a:fld>
             <a:endParaRPr lang="en-US"/>
           </a:p>
@@ -4438,7 +4437,7 @@
           <a:p>
             <a:fld id="{0421086B-92A0-4D22-94D7-207C8E029793}" type="datetime1">
               <a:rPr lang="ko-KR" altLang="en-US" smtClean="0"/>
-              <a:t>2025-09-02</a:t>
+              <a:t>2025-09-03</a:t>
             </a:fld>
             <a:endParaRPr lang="en-US" dirty="0"/>
           </a:p>
@@ -4691,7 +4690,7 @@
           <a:p>
             <a:fld id="{9AA789D4-F75C-46F1-A8E1-B49D7553F821}" type="datetime1">
               <a:rPr lang="ko-KR" altLang="en-US" smtClean="0"/>
-              <a:t>2025-09-02</a:t>
+              <a:t>2025-09-03</a:t>
             </a:fld>
             <a:endParaRPr lang="en-US"/>
           </a:p>
@@ -4932,7 +4931,7 @@
           <a:p>
             <a:fld id="{6E95217A-41F5-40B0-A1B1-26DD36AFCC5B}" type="datetime1">
               <a:rPr lang="ko-KR" altLang="en-US" smtClean="0"/>
-              <a:t>2025-09-02</a:t>
+              <a:t>2025-09-03</a:t>
             </a:fld>
             <a:endParaRPr lang="en-US"/>
           </a:p>
@@ -5163,7 +5162,7 @@
           <a:p>
             <a:fld id="{2EABA43C-120F-4415-98B3-372D2FECC855}" type="datetime1">
               <a:rPr lang="ko-KR" altLang="en-US" smtClean="0"/>
-              <a:t>2025-09-02</a:t>
+              <a:t>2025-09-03</a:t>
             </a:fld>
             <a:endParaRPr lang="en-US"/>
           </a:p>
@@ -5790,7 +5789,7 @@
           <a:p>
             <a:fld id="{7A3EB572-C624-418B-8597-163D90616FC8}" type="datetime1">
               <a:rPr lang="ko-KR" altLang="en-US" smtClean="0"/>
-              <a:t>2025-09-02</a:t>
+              <a:t>2025-09-03</a:t>
             </a:fld>
             <a:endParaRPr lang="ko-KR" altLang="en-US" dirty="0"/>
           </a:p>
@@ -6160,7 +6159,7 @@
           <a:p>
             <a:fld id="{BE760CE9-DAAA-4235-992F-BD3E0145916A}" type="datetime1">
               <a:rPr lang="ko-KR" altLang="en-US" smtClean="0"/>
-              <a:t>2025-09-02</a:t>
+              <a:t>2025-09-03</a:t>
             </a:fld>
             <a:endParaRPr lang="en-US"/>
           </a:p>
@@ -6660,7 +6659,7 @@
           <a:p>
             <a:fld id="{12DB1AE6-F89A-4A3B-A7FF-0FB649FB73D9}" type="datetime1">
               <a:rPr lang="ko-KR" altLang="en-US" smtClean="0"/>
-              <a:t>2025-09-02</a:t>
+              <a:t>2025-09-03</a:t>
             </a:fld>
             <a:endParaRPr lang="en-US"/>
           </a:p>
@@ -6808,7 +6807,7 @@
           <a:p>
             <a:fld id="{D692FE0A-EA49-4D7D-9497-837FBECB3F6B}" type="datetime1">
               <a:rPr lang="ko-KR" altLang="en-US" smtClean="0"/>
-              <a:t>2025-09-02</a:t>
+              <a:t>2025-09-03</a:t>
             </a:fld>
             <a:endParaRPr lang="en-US"/>
           </a:p>
@@ -6925,7 +6924,7 @@
           <a:p>
             <a:fld id="{56FBB2DF-47A9-40D1-8CCE-28FE2873E83F}" type="datetime1">
               <a:rPr lang="ko-KR" altLang="en-US" smtClean="0"/>
-              <a:t>2025-09-02</a:t>
+              <a:t>2025-09-03</a:t>
             </a:fld>
             <a:endParaRPr lang="en-US"/>
           </a:p>
@@ -7391,7 +7390,7 @@
           <a:p>
             <a:fld id="{490B79C2-6C94-403B-8C2C-F3D94681D3D0}" type="datetime1">
               <a:rPr lang="ko-KR" altLang="en-US" smtClean="0"/>
-              <a:t>2025-09-02</a:t>
+              <a:t>2025-09-03</a:t>
             </a:fld>
             <a:endParaRPr lang="en-US"/>
           </a:p>
@@ -7664,7 +7663,7 @@
           <a:p>
             <a:fld id="{85759F83-5FB7-41EB-8B77-54D18451864A}" type="datetime1">
               <a:rPr lang="ko-KR" altLang="en-US" smtClean="0"/>
-              <a:t>2025-09-02</a:t>
+              <a:t>2025-09-03</a:t>
             </a:fld>
             <a:endParaRPr lang="en-US" dirty="0"/>
           </a:p>
@@ -8212,7 +8211,7 @@
           <a:p>
             <a:fld id="{98D2B5FF-957F-493E-A036-A1B14CB1BDF4}" type="datetime1">
               <a:rPr lang="ko-KR" altLang="en-US" smtClean="0"/>
-              <a:t>2025-09-02</a:t>
+              <a:t>2025-09-03</a:t>
             </a:fld>
             <a:endParaRPr lang="en-US" dirty="0"/>
           </a:p>
@@ -9004,282 +9003,6 @@
           <p:cNvPr id="2" name="제목 1">
             <a:extLst>
               <a:ext uri="{FF2B5EF4-FFF2-40B4-BE49-F238E27FC236}">
-                <a16:creationId xmlns:a16="http://schemas.microsoft.com/office/drawing/2014/main" id="{626C04A5-3BD8-30A0-B164-214EAD7CC9CC}"/>
-              </a:ext>
-            </a:extLst>
-          </p:cNvPr>
-          <p:cNvSpPr>
-            <a:spLocks noGrp="1"/>
-          </p:cNvSpPr>
-          <p:nvPr>
-            <p:ph type="title"/>
-          </p:nvPr>
-        </p:nvSpPr>
-        <p:spPr/>
-        <p:txBody>
-          <a:bodyPr/>
-          <a:lstStyle/>
-          <a:p>
-            <a:r>
-              <a:rPr lang="ko-KR" altLang="en-US" dirty="0" err="1"/>
-              <a:t>데드</a:t>
-            </a:r>
-            <a:r>
-              <a:rPr lang="ko-KR" altLang="en-US" dirty="0"/>
-              <a:t> </a:t>
-            </a:r>
-            <a:r>
-              <a:rPr lang="ko-KR" altLang="en-US" dirty="0" err="1"/>
-              <a:t>레커닝</a:t>
-            </a:r>
-            <a:r>
-              <a:rPr lang="en-US" altLang="ko-KR" dirty="0"/>
-              <a:t> (</a:t>
-            </a:r>
-            <a:r>
-              <a:rPr lang="ko-KR" altLang="en-US" dirty="0"/>
-              <a:t>클라이언트</a:t>
-            </a:r>
-            <a:r>
-              <a:rPr lang="en-US" altLang="ko-KR" dirty="0"/>
-              <a:t>)</a:t>
-            </a:r>
-            <a:endParaRPr lang="ko-KR" altLang="en-US" dirty="0"/>
-          </a:p>
-        </p:txBody>
-      </p:sp>
-      <p:sp>
-        <p:nvSpPr>
-          <p:cNvPr id="3" name="내용 개체 틀 2">
-            <a:extLst>
-              <a:ext uri="{FF2B5EF4-FFF2-40B4-BE49-F238E27FC236}">
-                <a16:creationId xmlns:a16="http://schemas.microsoft.com/office/drawing/2014/main" id="{B958C443-B637-797E-52B9-6F5EE3179BE3}"/>
-              </a:ext>
-            </a:extLst>
-          </p:cNvPr>
-          <p:cNvSpPr>
-            <a:spLocks noGrp="1"/>
-          </p:cNvSpPr>
-          <p:nvPr>
-            <p:ph idx="1"/>
-          </p:nvPr>
-        </p:nvSpPr>
-        <p:spPr/>
-        <p:txBody>
-          <a:bodyPr/>
-          <a:lstStyle/>
-          <a:p>
-            <a:r>
-              <a:rPr lang="ko-KR" altLang="en-US" dirty="0"/>
-              <a:t>클라이언트 측에서는 서버 부하감소와 게임 반응성 향상을 위해 </a:t>
-            </a:r>
-            <a:r>
-              <a:rPr lang="ko-KR" altLang="en-US" dirty="0" err="1"/>
-              <a:t>데드레커닝을</a:t>
-            </a:r>
-            <a:r>
-              <a:rPr lang="ko-KR" altLang="en-US" dirty="0"/>
-              <a:t> 사용</a:t>
-            </a:r>
-          </a:p>
-        </p:txBody>
-      </p:sp>
-      <p:sp>
-        <p:nvSpPr>
-          <p:cNvPr id="4" name="날짜 개체 틀 3">
-            <a:extLst>
-              <a:ext uri="{FF2B5EF4-FFF2-40B4-BE49-F238E27FC236}">
-                <a16:creationId xmlns:a16="http://schemas.microsoft.com/office/drawing/2014/main" id="{C896B92D-1D14-9355-A1FE-164F381448FA}"/>
-              </a:ext>
-            </a:extLst>
-          </p:cNvPr>
-          <p:cNvSpPr>
-            <a:spLocks noGrp="1"/>
-          </p:cNvSpPr>
-          <p:nvPr>
-            <p:ph type="dt" sz="half" idx="10"/>
-          </p:nvPr>
-        </p:nvSpPr>
-        <p:spPr/>
-        <p:txBody>
-          <a:bodyPr/>
-          <a:lstStyle/>
-          <a:p>
-            <a:fld id="{2EABA43C-120F-4415-98B3-372D2FECC855}" type="datetime1">
-              <a:rPr lang="ko-KR" altLang="en-US" smtClean="0"/>
-              <a:t>2025-09-02</a:t>
-            </a:fld>
-            <a:endParaRPr lang="en-US"/>
-          </a:p>
-        </p:txBody>
-      </p:sp>
-      <p:pic>
-        <p:nvPicPr>
-          <p:cNvPr id="6" name="그림 5">
-            <a:extLst>
-              <a:ext uri="{FF2B5EF4-FFF2-40B4-BE49-F238E27FC236}">
-                <a16:creationId xmlns:a16="http://schemas.microsoft.com/office/drawing/2014/main" id="{5B77AF85-1BD5-1134-024D-ACC83F50D903}"/>
-              </a:ext>
-            </a:extLst>
-          </p:cNvPr>
-          <p:cNvPicPr>
-            <a:picLocks noChangeAspect="1"/>
-          </p:cNvPicPr>
-          <p:nvPr/>
-        </p:nvPicPr>
-        <p:blipFill>
-          <a:blip r:embed="rId2"/>
-          <a:stretch>
-            <a:fillRect/>
-          </a:stretch>
-        </p:blipFill>
-        <p:spPr>
-          <a:xfrm>
-            <a:off x="1352061" y="2528529"/>
-            <a:ext cx="3430701" cy="3216550"/>
-          </a:xfrm>
-          <a:prstGeom prst="rect">
-            <a:avLst/>
-          </a:prstGeom>
-        </p:spPr>
-      </p:pic>
-      <p:sp>
-        <p:nvSpPr>
-          <p:cNvPr id="7" name="TextBox 6">
-            <a:extLst>
-              <a:ext uri="{FF2B5EF4-FFF2-40B4-BE49-F238E27FC236}">
-                <a16:creationId xmlns:a16="http://schemas.microsoft.com/office/drawing/2014/main" id="{B6012A22-E7DD-9F5D-5336-5551D0F0271B}"/>
-              </a:ext>
-            </a:extLst>
-          </p:cNvPr>
-          <p:cNvSpPr txBox="1"/>
-          <p:nvPr/>
-        </p:nvSpPr>
-        <p:spPr>
-          <a:xfrm>
-            <a:off x="2249905" y="5745079"/>
-            <a:ext cx="2099511" cy="369332"/>
-          </a:xfrm>
-          <a:prstGeom prst="rect">
-            <a:avLst/>
-          </a:prstGeom>
-          <a:noFill/>
-        </p:spPr>
-        <p:txBody>
-          <a:bodyPr wrap="square" rtlCol="0">
-            <a:spAutoFit/>
-          </a:bodyPr>
-          <a:lstStyle/>
-          <a:p>
-            <a:r>
-              <a:rPr lang="en-US" altLang="ko-KR" dirty="0" err="1"/>
-              <a:t>MyPlayer</a:t>
-            </a:r>
-            <a:endParaRPr lang="ko-KR" altLang="en-US" dirty="0"/>
-          </a:p>
-        </p:txBody>
-      </p:sp>
-      <p:pic>
-        <p:nvPicPr>
-          <p:cNvPr id="9" name="그림 8">
-            <a:extLst>
-              <a:ext uri="{FF2B5EF4-FFF2-40B4-BE49-F238E27FC236}">
-                <a16:creationId xmlns:a16="http://schemas.microsoft.com/office/drawing/2014/main" id="{FA07C234-21A5-9EB2-5185-7D86CD7C110A}"/>
-              </a:ext>
-            </a:extLst>
-          </p:cNvPr>
-          <p:cNvPicPr>
-            <a:picLocks noChangeAspect="1"/>
-          </p:cNvPicPr>
-          <p:nvPr/>
-        </p:nvPicPr>
-        <p:blipFill>
-          <a:blip r:embed="rId3"/>
-          <a:stretch>
-            <a:fillRect/>
-          </a:stretch>
-        </p:blipFill>
-        <p:spPr>
-          <a:xfrm>
-            <a:off x="5068023" y="2528529"/>
-            <a:ext cx="5573520" cy="1658786"/>
-          </a:xfrm>
-          <a:prstGeom prst="rect">
-            <a:avLst/>
-          </a:prstGeom>
-        </p:spPr>
-      </p:pic>
-      <p:sp>
-        <p:nvSpPr>
-          <p:cNvPr id="10" name="TextBox 9">
-            <a:extLst>
-              <a:ext uri="{FF2B5EF4-FFF2-40B4-BE49-F238E27FC236}">
-                <a16:creationId xmlns:a16="http://schemas.microsoft.com/office/drawing/2014/main" id="{6E875454-2208-0DF3-32E0-0E6D097242E6}"/>
-              </a:ext>
-            </a:extLst>
-          </p:cNvPr>
-          <p:cNvSpPr txBox="1"/>
-          <p:nvPr/>
-        </p:nvSpPr>
-        <p:spPr>
-          <a:xfrm>
-            <a:off x="6359484" y="4276241"/>
-            <a:ext cx="2099511" cy="369332"/>
-          </a:xfrm>
-          <a:prstGeom prst="rect">
-            <a:avLst/>
-          </a:prstGeom>
-          <a:noFill/>
-        </p:spPr>
-        <p:txBody>
-          <a:bodyPr wrap="square" rtlCol="0">
-            <a:spAutoFit/>
-          </a:bodyPr>
-          <a:lstStyle/>
-          <a:p>
-            <a:r>
-              <a:rPr lang="en-US" altLang="ko-KR" dirty="0" err="1"/>
-              <a:t>OtherPlayer</a:t>
-            </a:r>
-            <a:endParaRPr lang="ko-KR" altLang="en-US" dirty="0"/>
-          </a:p>
-        </p:txBody>
-      </p:sp>
-    </p:spTree>
-    <p:extLst>
-      <p:ext uri="{BB962C8B-B14F-4D97-AF65-F5344CB8AC3E}">
-        <p14:creationId xmlns:p14="http://schemas.microsoft.com/office/powerpoint/2010/main" val="1148765842"/>
-      </p:ext>
-    </p:extLst>
-  </p:cSld>
-  <p:clrMapOvr>
-    <a:masterClrMapping/>
-  </p:clrMapOvr>
-</p:sld>
-</file>
-
-<file path=ppt/slides/slide11.xml><?xml version="1.0" encoding="utf-8"?>
-<p:sld xmlns:a="http://schemas.openxmlformats.org/drawingml/2006/main" xmlns:r="http://schemas.openxmlformats.org/officeDocument/2006/relationships" xmlns:p="http://schemas.openxmlformats.org/presentationml/2006/main">
-  <p:cSld>
-    <p:spTree>
-      <p:nvGrpSpPr>
-        <p:cNvPr id="1" name=""/>
-        <p:cNvGrpSpPr/>
-        <p:nvPr/>
-      </p:nvGrpSpPr>
-      <p:grpSpPr>
-        <a:xfrm>
-          <a:off x="0" y="0"/>
-          <a:ext cx="0" cy="0"/>
-          <a:chOff x="0" y="0"/>
-          <a:chExt cx="0" cy="0"/>
-        </a:xfrm>
-      </p:grpSpPr>
-      <p:sp>
-        <p:nvSpPr>
-          <p:cNvPr id="2" name="제목 1">
-            <a:extLst>
-              <a:ext uri="{FF2B5EF4-FFF2-40B4-BE49-F238E27FC236}">
                 <a16:creationId xmlns:a16="http://schemas.microsoft.com/office/drawing/2014/main" id="{2B9563F7-937A-0323-AB79-0024604124A3}"/>
               </a:ext>
             </a:extLst>
@@ -9485,7 +9208,7 @@
 </p:sld>
 </file>
 
-<file path=ppt/slides/slide12.xml><?xml version="1.0" encoding="utf-8"?>
+<file path=ppt/slides/slide11.xml><?xml version="1.0" encoding="utf-8"?>
 <p:sld xmlns:a="http://schemas.openxmlformats.org/drawingml/2006/main" xmlns:r="http://schemas.openxmlformats.org/officeDocument/2006/relationships" xmlns:p="http://schemas.openxmlformats.org/presentationml/2006/main">
   <p:cSld>
     <p:spTree>
@@ -9884,6 +9607,140 @@
 </file>
 
 <file path=ppt/slides/slide3.xml><?xml version="1.0" encoding="utf-8"?>
+<p:sld xmlns:a="http://schemas.openxmlformats.org/drawingml/2006/main" xmlns:r="http://schemas.openxmlformats.org/officeDocument/2006/relationships" xmlns:p="http://schemas.openxmlformats.org/presentationml/2006/main">
+  <p:cSld>
+    <p:spTree>
+      <p:nvGrpSpPr>
+        <p:cNvPr id="1" name=""/>
+        <p:cNvGrpSpPr/>
+        <p:nvPr/>
+      </p:nvGrpSpPr>
+      <p:grpSpPr>
+        <a:xfrm>
+          <a:off x="0" y="0"/>
+          <a:ext cx="0" cy="0"/>
+          <a:chOff x="0" y="0"/>
+          <a:chExt cx="0" cy="0"/>
+        </a:xfrm>
+      </p:grpSpPr>
+      <p:sp>
+        <p:nvSpPr>
+          <p:cNvPr id="2" name="제목 1">
+            <a:extLst>
+              <a:ext uri="{FF2B5EF4-FFF2-40B4-BE49-F238E27FC236}">
+                <a16:creationId xmlns:a16="http://schemas.microsoft.com/office/drawing/2014/main" id="{D0579222-AAC2-BB5C-2FCD-ED5D27222F7D}"/>
+              </a:ext>
+            </a:extLst>
+          </p:cNvPr>
+          <p:cNvSpPr>
+            <a:spLocks noGrp="1"/>
+          </p:cNvSpPr>
+          <p:nvPr>
+            <p:ph type="title"/>
+          </p:nvPr>
+        </p:nvSpPr>
+        <p:spPr>
+          <a:xfrm>
+            <a:off x="640080" y="268126"/>
+            <a:ext cx="10058400" cy="1371600"/>
+          </a:xfrm>
+        </p:spPr>
+        <p:txBody>
+          <a:bodyPr/>
+          <a:lstStyle/>
+          <a:p>
+            <a:r>
+              <a:rPr lang="ko-KR" altLang="en-US" dirty="0"/>
+              <a:t>게임 화면</a:t>
+            </a:r>
+          </a:p>
+        </p:txBody>
+      </p:sp>
+      <p:pic>
+        <p:nvPicPr>
+          <p:cNvPr id="6" name="내용 개체 틀 5">
+            <a:extLst>
+              <a:ext uri="{FF2B5EF4-FFF2-40B4-BE49-F238E27FC236}">
+                <a16:creationId xmlns:a16="http://schemas.microsoft.com/office/drawing/2014/main" id="{7E5C9515-9704-D6D4-60BE-2539189C684B}"/>
+              </a:ext>
+            </a:extLst>
+          </p:cNvPr>
+          <p:cNvPicPr>
+            <a:picLocks noGrp="1" noChangeAspect="1"/>
+          </p:cNvPicPr>
+          <p:nvPr>
+            <p:ph idx="1"/>
+          </p:nvPr>
+        </p:nvPicPr>
+        <p:blipFill>
+          <a:blip r:embed="rId2">
+            <a:extLst>
+              <a:ext uri="{28A0092B-C50C-407E-A947-70E740481C1C}">
+                <a14:useLocalDpi xmlns:a14="http://schemas.microsoft.com/office/drawing/2010/main" val="0"/>
+              </a:ext>
+            </a:extLst>
+          </a:blip>
+          <a:stretch>
+            <a:fillRect/>
+          </a:stretch>
+        </p:blipFill>
+        <p:spPr>
+          <a:xfrm>
+            <a:off x="1389017" y="1328394"/>
+            <a:ext cx="8969829" cy="2404435"/>
+          </a:xfrm>
+        </p:spPr>
+      </p:pic>
+      <p:pic>
+        <p:nvPicPr>
+          <p:cNvPr id="8" name="그림 7">
+            <a:extLst>
+              <a:ext uri="{FF2B5EF4-FFF2-40B4-BE49-F238E27FC236}">
+                <a16:creationId xmlns:a16="http://schemas.microsoft.com/office/drawing/2014/main" id="{D5E61998-BF88-0D0C-3702-F4009E03D73C}"/>
+              </a:ext>
+            </a:extLst>
+          </p:cNvPr>
+          <p:cNvPicPr>
+            <a:picLocks noChangeAspect="1"/>
+          </p:cNvPicPr>
+          <p:nvPr/>
+        </p:nvPicPr>
+        <p:blipFill>
+          <a:blip r:embed="rId3">
+            <a:extLst>
+              <a:ext uri="{28A0092B-C50C-407E-A947-70E740481C1C}">
+                <a14:useLocalDpi xmlns:a14="http://schemas.microsoft.com/office/drawing/2010/main" val="0"/>
+              </a:ext>
+            </a:extLst>
+          </a:blip>
+          <a:stretch>
+            <a:fillRect/>
+          </a:stretch>
+        </p:blipFill>
+        <p:spPr>
+          <a:xfrm>
+            <a:off x="1389017" y="3845838"/>
+            <a:ext cx="8969829" cy="2465290"/>
+          </a:xfrm>
+          <a:prstGeom prst="rect">
+            <a:avLst/>
+          </a:prstGeom>
+        </p:spPr>
+      </p:pic>
+    </p:spTree>
+    <p:extLst>
+      <p:ext uri="{BB962C8B-B14F-4D97-AF65-F5344CB8AC3E}">
+        <p14:creationId xmlns:p14="http://schemas.microsoft.com/office/powerpoint/2010/main" val="3024886238"/>
+      </p:ext>
+    </p:extLst>
+  </p:cSld>
+  <p:clrMapOvr>
+    <a:masterClrMapping/>
+  </p:clrMapOvr>
+</p:sld>
+</file>
+
+<file path=ppt/slides/slide4.xml><?xml version="1.0" encoding="utf-8"?>
 <p:sld xmlns:a="http://schemas.openxmlformats.org/drawingml/2006/main" xmlns:r="http://schemas.openxmlformats.org/officeDocument/2006/relationships" xmlns:p="http://schemas.openxmlformats.org/presentationml/2006/main">
   <p:cSld>
     <p:spTree>
@@ -10867,7 +10724,7 @@
 </p:sld>
 </file>
 
-<file path=ppt/slides/slide4.xml><?xml version="1.0" encoding="utf-8"?>
+<file path=ppt/slides/slide5.xml><?xml version="1.0" encoding="utf-8"?>
 <p:sld xmlns:a="http://schemas.openxmlformats.org/drawingml/2006/main" xmlns:r="http://schemas.openxmlformats.org/officeDocument/2006/relationships" xmlns:p="http://schemas.openxmlformats.org/presentationml/2006/main">
   <p:cSld>
     <p:spTree>
@@ -11097,7 +10954,7 @@
 </p:sld>
 </file>
 
-<file path=ppt/slides/slide5.xml><?xml version="1.0" encoding="utf-8"?>
+<file path=ppt/slides/slide6.xml><?xml version="1.0" encoding="utf-8"?>
 <p:sld xmlns:a="http://schemas.openxmlformats.org/drawingml/2006/main" xmlns:r="http://schemas.openxmlformats.org/officeDocument/2006/relationships" xmlns:p="http://schemas.openxmlformats.org/presentationml/2006/main">
   <p:cSld>
     <p:spTree>
@@ -11676,6 +11533,58 @@
           </p:txBody>
         </p:sp>
       </p:grpSp>
+      <p:sp>
+        <p:nvSpPr>
+          <p:cNvPr id="4" name="TextBox 3">
+            <a:extLst>
+              <a:ext uri="{FF2B5EF4-FFF2-40B4-BE49-F238E27FC236}">
+                <a16:creationId xmlns:a16="http://schemas.microsoft.com/office/drawing/2014/main" id="{B74436C9-2374-BB06-E38D-A61C3BDA9100}"/>
+              </a:ext>
+            </a:extLst>
+          </p:cNvPr>
+          <p:cNvSpPr txBox="1"/>
+          <p:nvPr/>
+        </p:nvSpPr>
+        <p:spPr>
+          <a:xfrm>
+            <a:off x="2415887" y="4617186"/>
+            <a:ext cx="5584964" cy="369332"/>
+          </a:xfrm>
+          <a:prstGeom prst="rect">
+            <a:avLst/>
+          </a:prstGeom>
+          <a:noFill/>
+        </p:spPr>
+        <p:txBody>
+          <a:bodyPr wrap="square" rtlCol="0">
+            <a:spAutoFit/>
+          </a:bodyPr>
+          <a:lstStyle/>
+          <a:p>
+            <a:r>
+              <a:rPr lang="en-US" altLang="ko-KR" dirty="0"/>
+              <a:t>If diff(P1.Mmr, </a:t>
+            </a:r>
+            <a:r>
+              <a:rPr lang="en-US" altLang="ko-KR" dirty="0" err="1"/>
+              <a:t>Pn.Mmr</a:t>
+            </a:r>
+            <a:r>
+              <a:rPr lang="en-US" altLang="ko-KR" dirty="0"/>
+              <a:t>) &lt; </a:t>
+            </a:r>
+            <a:r>
+              <a:rPr lang="en-US" altLang="ko-KR" dirty="0" err="1"/>
+              <a:t>WindowSize</a:t>
+            </a:r>
+            <a:r>
+              <a:rPr lang="en-US" altLang="ko-KR" dirty="0"/>
+              <a:t> =&gt; Pick! </a:t>
+            </a:r>
+            <a:endParaRPr lang="ko-KR" altLang="en-US" dirty="0"/>
+          </a:p>
+        </p:txBody>
+      </p:sp>
     </p:spTree>
     <p:extLst>
       <p:ext uri="{BB962C8B-B14F-4D97-AF65-F5344CB8AC3E}">
@@ -11689,7 +11598,7 @@
 </p:sld>
 </file>
 
-<file path=ppt/slides/slide6.xml><?xml version="1.0" encoding="utf-8"?>
+<file path=ppt/slides/slide7.xml><?xml version="1.0" encoding="utf-8"?>
 <p:sld xmlns:a="http://schemas.openxmlformats.org/drawingml/2006/main" xmlns:r="http://schemas.openxmlformats.org/officeDocument/2006/relationships" xmlns:p="http://schemas.openxmlformats.org/presentationml/2006/main">
   <p:cSld>
     <p:spTree>
@@ -11740,7 +11649,7 @@
               <a:t>여기 수정해라</a:t>
             </a:r>
             <a:r>
-              <a:rPr lang="en-US" altLang="ko-KR"/>
+              <a:rPr lang="en-US" altLang="ko-KR" dirty="0"/>
               <a:t>~~~~)</a:t>
             </a:r>
             <a:endParaRPr lang="ko-KR" altLang="en-US" dirty="0"/>
@@ -11770,49 +11679,19 @@
           <a:p>
             <a:r>
               <a:rPr lang="ko-KR" altLang="en-US" dirty="0"/>
-              <a:t>패킷을 처리하는 함수는 요청에 맞는 작업</a:t>
+              <a:t>플레이는 </a:t>
+            </a:r>
+            <a:r>
+              <a:rPr lang="en-US" altLang="ko-KR" dirty="0" err="1"/>
+              <a:t>GameRoom</a:t>
+            </a:r>
+            <a:r>
+              <a:rPr lang="ko-KR" altLang="en-US" dirty="0"/>
+              <a:t>에서 이뤄집니다</a:t>
             </a:r>
             <a:r>
               <a:rPr lang="en-US" altLang="ko-KR" dirty="0"/>
-              <a:t>(</a:t>
-            </a:r>
-            <a:r>
-              <a:rPr lang="en-US" altLang="ko-KR" dirty="0" err="1"/>
-              <a:t>db</a:t>
-            </a:r>
-            <a:r>
-              <a:rPr lang="ko-KR" altLang="en-US" dirty="0"/>
-              <a:t>요청</a:t>
-            </a:r>
-            <a:r>
-              <a:rPr lang="en-US" altLang="ko-KR" dirty="0"/>
-              <a:t>, Zone </a:t>
-            </a:r>
-            <a:r>
-              <a:rPr lang="ko-KR" altLang="en-US" dirty="0"/>
-              <a:t>작업</a:t>
-            </a:r>
-            <a:r>
-              <a:rPr lang="en-US" altLang="ko-KR" dirty="0"/>
-              <a:t>) </a:t>
-            </a:r>
-            <a:r>
-              <a:rPr lang="ko-KR" altLang="en-US" dirty="0"/>
-              <a:t>을 알맞은 대상에게 위탁</a:t>
-            </a:r>
-            <a:r>
-              <a:rPr lang="en-US" altLang="ko-KR" dirty="0"/>
-              <a:t>.</a:t>
-            </a:r>
-          </a:p>
-          <a:p>
-            <a:r>
-              <a:rPr lang="en-US" altLang="ko-KR" dirty="0"/>
-              <a:t>Zone </a:t>
-            </a:r>
-            <a:r>
-              <a:rPr lang="ko-KR" altLang="en-US" dirty="0"/>
-              <a:t>기반 작업은 </a:t>
+              <a:t>. </a:t>
             </a:r>
             <a:r>
               <a:rPr lang="ko-KR" altLang="en-US" dirty="0" err="1"/>
@@ -11824,7 +11703,7 @@
             </a:r>
             <a:r>
               <a:rPr lang="en-US" altLang="ko-KR" dirty="0" err="1"/>
-              <a:t>MessageQueue</a:t>
+              <a:t>JobQueue</a:t>
             </a:r>
             <a:r>
               <a:rPr lang="ko-KR" altLang="en-US" dirty="0"/>
@@ -11856,11 +11735,19 @@
             </a:r>
             <a:r>
               <a:rPr lang="en-US" altLang="ko-KR" dirty="0"/>
-              <a:t>Zone </a:t>
+              <a:t> </a:t>
+            </a:r>
+            <a:r>
+              <a:rPr lang="en-US" altLang="ko-KR" dirty="0" err="1"/>
+              <a:t>GameRoom</a:t>
+            </a:r>
+            <a:r>
+              <a:rPr lang="en-US" altLang="ko-KR" dirty="0"/>
+              <a:t> </a:t>
             </a:r>
             <a:r>
               <a:rPr lang="ko-KR" altLang="en-US" dirty="0"/>
-              <a:t>작업을 수행 </a:t>
+              <a:t>로직 처리를 수행 </a:t>
             </a:r>
             <a:endParaRPr lang="en-US" altLang="ko-KR" dirty="0"/>
           </a:p>
@@ -11901,7 +11788,7 @@
           <a:p>
             <a:fld id="{2EABA43C-120F-4415-98B3-372D2FECC855}" type="datetime1">
               <a:rPr lang="ko-KR" altLang="en-US" smtClean="0"/>
-              <a:t>2025-09-02</a:t>
+              <a:t>2025-09-03</a:t>
             </a:fld>
             <a:endParaRPr lang="en-US"/>
           </a:p>
@@ -11980,7 +11867,7 @@
 </p:sld>
 </file>
 
-<file path=ppt/slides/slide7.xml><?xml version="1.0" encoding="utf-8"?>
+<file path=ppt/slides/slide8.xml><?xml version="1.0" encoding="utf-8"?>
 <p:sld xmlns:a="http://schemas.openxmlformats.org/drawingml/2006/main" xmlns:r="http://schemas.openxmlformats.org/officeDocument/2006/relationships" xmlns:p="http://schemas.openxmlformats.org/presentationml/2006/main">
   <p:cSld>
     <p:spTree>
@@ -12024,8 +11911,12 @@
           <a:lstStyle/>
           <a:p>
             <a:r>
+              <a:rPr lang="ko-KR" altLang="en-US" dirty="0" err="1"/>
+              <a:t>게임룸</a:t>
+            </a:r>
+            <a:r>
               <a:rPr lang="ko-KR" altLang="en-US" dirty="0"/>
-              <a:t>월드 구성</a:t>
+              <a:t> 상태</a:t>
             </a:r>
           </a:p>
         </p:txBody>
@@ -12048,7 +11939,7 @@
         </p:nvSpPr>
         <p:spPr>
           <a:xfrm>
-            <a:off x="753979" y="1345130"/>
+            <a:off x="811816" y="1543032"/>
             <a:ext cx="10058400" cy="3849624"/>
           </a:xfrm>
         </p:spPr>
@@ -12057,20 +11948,8 @@
           <a:lstStyle/>
           <a:p>
             <a:r>
-              <a:rPr lang="ko-KR" altLang="en-US" dirty="0"/>
-              <a:t>월드는 </a:t>
-            </a:r>
-            <a:r>
-              <a:rPr lang="en-US" altLang="ko-KR" dirty="0"/>
-              <a:t>Zone </a:t>
-            </a:r>
-            <a:r>
-              <a:rPr lang="ko-KR" altLang="en-US" dirty="0"/>
-              <a:t>단위로 구성되며 </a:t>
-            </a:r>
-            <a:r>
-              <a:rPr lang="en-US" altLang="ko-KR" dirty="0"/>
-              <a:t>Zone</a:t>
+              <a:rPr lang="en-US" altLang="ko-KR" dirty="0" err="1"/>
+              <a:t>GameRoom</a:t>
             </a:r>
             <a:r>
               <a:rPr lang="ko-KR" altLang="en-US" dirty="0"/>
@@ -12078,38 +11957,19 @@
             </a:r>
             <a:r>
               <a:rPr lang="en-US" altLang="ko-KR" dirty="0"/>
-              <a:t>Section (10x10 </a:t>
+              <a:t>FSM</a:t>
             </a:r>
             <a:r>
               <a:rPr lang="ko-KR" altLang="en-US" dirty="0"/>
-              <a:t>사이즈</a:t>
+              <a:t>으로 </a:t>
             </a:r>
             <a:r>
               <a:rPr lang="en-US" altLang="ko-KR" dirty="0"/>
-              <a:t>) </a:t>
+              <a:t>room</a:t>
             </a:r>
             <a:r>
               <a:rPr lang="ko-KR" altLang="en-US" dirty="0"/>
-              <a:t>으로 나뉘어짐</a:t>
-            </a:r>
-            <a:endParaRPr lang="en-US" altLang="ko-KR" dirty="0"/>
-          </a:p>
-          <a:p>
-            <a:r>
-              <a:rPr lang="en-US" altLang="ko-KR" dirty="0"/>
-              <a:t>Broadcast</a:t>
-            </a:r>
-            <a:r>
-              <a:rPr lang="ko-KR" altLang="en-US" dirty="0"/>
-              <a:t>는 </a:t>
-            </a:r>
-            <a:r>
-              <a:rPr lang="en-US" altLang="ko-KR" dirty="0"/>
-              <a:t>Section </a:t>
-            </a:r>
-            <a:r>
-              <a:rPr lang="ko-KR" altLang="en-US" dirty="0"/>
-              <a:t>단위로 전송</a:t>
+              <a:t>의 상태를 관리</a:t>
             </a:r>
             <a:endParaRPr lang="en-US" altLang="ko-KR" dirty="0"/>
           </a:p>
@@ -12117,10 +11977,10 @@
       </p:sp>
       <p:grpSp>
         <p:nvGrpSpPr>
-          <p:cNvPr id="15" name="그룹 14">
+          <p:cNvPr id="4" name="그룹 3">
             <a:extLst>
               <a:ext uri="{FF2B5EF4-FFF2-40B4-BE49-F238E27FC236}">
-                <a16:creationId xmlns:a16="http://schemas.microsoft.com/office/drawing/2014/main" id="{289AC150-AEAB-611A-0A04-D8333F2F8149}"/>
+                <a16:creationId xmlns:a16="http://schemas.microsoft.com/office/drawing/2014/main" id="{B3772430-A6BB-0739-3087-EDFD806FE798}"/>
               </a:ext>
             </a:extLst>
           </p:cNvPr>
@@ -12129,952 +11989,7 @@
         </p:nvGrpSpPr>
         <p:grpSpPr>
           <a:xfrm>
-            <a:off x="1199147" y="2164373"/>
-            <a:ext cx="7742321" cy="3928310"/>
-            <a:chOff x="1066800" y="2448427"/>
-            <a:chExt cx="7742321" cy="3928310"/>
-          </a:xfrm>
-        </p:grpSpPr>
-        <p:sp>
-          <p:nvSpPr>
-            <p:cNvPr id="5" name="직사각형 4">
-              <a:extLst>
-                <a:ext uri="{FF2B5EF4-FFF2-40B4-BE49-F238E27FC236}">
-                  <a16:creationId xmlns:a16="http://schemas.microsoft.com/office/drawing/2014/main" id="{E6BE8260-8A65-02C5-AE47-B2CE790564F8}"/>
-                </a:ext>
-              </a:extLst>
-            </p:cNvPr>
-            <p:cNvSpPr/>
-            <p:nvPr/>
-          </p:nvSpPr>
-          <p:spPr>
-            <a:xfrm>
-              <a:off x="1066800" y="2448427"/>
-              <a:ext cx="7742321" cy="3928310"/>
-            </a:xfrm>
-            <a:prstGeom prst="rect">
-              <a:avLst/>
-            </a:prstGeom>
-            <a:solidFill>
-              <a:schemeClr val="accent6">
-                <a:lumMod val="40000"/>
-                <a:lumOff val="60000"/>
-              </a:schemeClr>
-            </a:solidFill>
-          </p:spPr>
-          <p:style>
-            <a:lnRef idx="2">
-              <a:schemeClr val="accent1">
-                <a:shade val="15000"/>
-              </a:schemeClr>
-            </a:lnRef>
-            <a:fillRef idx="1">
-              <a:schemeClr val="accent1"/>
-            </a:fillRef>
-            <a:effectRef idx="0">
-              <a:schemeClr val="accent1"/>
-            </a:effectRef>
-            <a:fontRef idx="minor">
-              <a:schemeClr val="lt1"/>
-            </a:fontRef>
-          </p:style>
-          <p:txBody>
-            <a:bodyPr rtlCol="0" anchor="ctr"/>
-            <a:lstStyle/>
-            <a:p>
-              <a:pPr algn="ctr"/>
-              <a:r>
-                <a:rPr lang="en-US" altLang="ko-KR" dirty="0" err="1">
-                  <a:solidFill>
-                    <a:schemeClr val="tx2">
-                      <a:lumMod val="50000"/>
-                    </a:schemeClr>
-                  </a:solidFill>
-                </a:rPr>
-                <a:t>ZoneManager</a:t>
-              </a:r>
-              <a:endParaRPr lang="ko-KR" altLang="en-US" dirty="0">
-                <a:solidFill>
-                  <a:schemeClr val="tx2">
-                    <a:lumMod val="50000"/>
-                  </a:schemeClr>
-                </a:solidFill>
-              </a:endParaRPr>
-            </a:p>
-          </p:txBody>
-        </p:sp>
-        <p:sp>
-          <p:nvSpPr>
-            <p:cNvPr id="7" name="직사각형 6">
-              <a:extLst>
-                <a:ext uri="{FF2B5EF4-FFF2-40B4-BE49-F238E27FC236}">
-                  <a16:creationId xmlns:a16="http://schemas.microsoft.com/office/drawing/2014/main" id="{647265C7-604C-6725-23CA-F01981F600F7}"/>
-                </a:ext>
-              </a:extLst>
-            </p:cNvPr>
-            <p:cNvSpPr/>
-            <p:nvPr/>
-          </p:nvSpPr>
-          <p:spPr>
-            <a:xfrm>
-              <a:off x="1461837" y="2833437"/>
-              <a:ext cx="2947737" cy="1269331"/>
-            </a:xfrm>
-            <a:prstGeom prst="rect">
-              <a:avLst/>
-            </a:prstGeom>
-            <a:solidFill>
-              <a:schemeClr val="accent6">
-                <a:lumMod val="75000"/>
-              </a:schemeClr>
-            </a:solidFill>
-          </p:spPr>
-          <p:style>
-            <a:lnRef idx="2">
-              <a:schemeClr val="accent1">
-                <a:shade val="15000"/>
-              </a:schemeClr>
-            </a:lnRef>
-            <a:fillRef idx="1">
-              <a:schemeClr val="accent1"/>
-            </a:fillRef>
-            <a:effectRef idx="0">
-              <a:schemeClr val="accent1"/>
-            </a:effectRef>
-            <a:fontRef idx="minor">
-              <a:schemeClr val="lt1"/>
-            </a:fontRef>
-          </p:style>
-          <p:txBody>
-            <a:bodyPr rtlCol="0" anchor="ctr"/>
-            <a:lstStyle/>
-            <a:p>
-              <a:pPr algn="ctr"/>
-              <a:endParaRPr lang="ko-KR" altLang="en-US"/>
-            </a:p>
-          </p:txBody>
-        </p:sp>
-        <p:sp>
-          <p:nvSpPr>
-            <p:cNvPr id="8" name="직사각형 7">
-              <a:extLst>
-                <a:ext uri="{FF2B5EF4-FFF2-40B4-BE49-F238E27FC236}">
-                  <a16:creationId xmlns:a16="http://schemas.microsoft.com/office/drawing/2014/main" id="{61175971-0B7C-67B1-CD09-37FC1ED40004}"/>
-                </a:ext>
-              </a:extLst>
-            </p:cNvPr>
-            <p:cNvSpPr/>
-            <p:nvPr/>
-          </p:nvSpPr>
-          <p:spPr>
-            <a:xfrm>
-              <a:off x="5005137" y="2833437"/>
-              <a:ext cx="2947737" cy="1269331"/>
-            </a:xfrm>
-            <a:prstGeom prst="rect">
-              <a:avLst/>
-            </a:prstGeom>
-            <a:solidFill>
-              <a:schemeClr val="accent6">
-                <a:lumMod val="75000"/>
-              </a:schemeClr>
-            </a:solidFill>
-          </p:spPr>
-          <p:style>
-            <a:lnRef idx="2">
-              <a:schemeClr val="accent1">
-                <a:shade val="15000"/>
-              </a:schemeClr>
-            </a:lnRef>
-            <a:fillRef idx="1">
-              <a:schemeClr val="accent1"/>
-            </a:fillRef>
-            <a:effectRef idx="0">
-              <a:schemeClr val="accent1"/>
-            </a:effectRef>
-            <a:fontRef idx="minor">
-              <a:schemeClr val="lt1"/>
-            </a:fontRef>
-          </p:style>
-          <p:txBody>
-            <a:bodyPr rtlCol="0" anchor="ctr"/>
-            <a:lstStyle/>
-            <a:p>
-              <a:pPr algn="ctr"/>
-              <a:r>
-                <a:rPr lang="en-US" altLang="ko-KR" dirty="0"/>
-                <a:t>Zone</a:t>
-              </a:r>
-              <a:endParaRPr lang="ko-KR" altLang="en-US" dirty="0"/>
-            </a:p>
-          </p:txBody>
-        </p:sp>
-        <p:sp>
-          <p:nvSpPr>
-            <p:cNvPr id="9" name="직사각형 8">
-              <a:extLst>
-                <a:ext uri="{FF2B5EF4-FFF2-40B4-BE49-F238E27FC236}">
-                  <a16:creationId xmlns:a16="http://schemas.microsoft.com/office/drawing/2014/main" id="{00F11FCB-361B-BD01-A168-7F94629BE63C}"/>
-                </a:ext>
-              </a:extLst>
-            </p:cNvPr>
-            <p:cNvSpPr/>
-            <p:nvPr/>
-          </p:nvSpPr>
-          <p:spPr>
-            <a:xfrm>
-              <a:off x="1474871" y="4632158"/>
-              <a:ext cx="2947737" cy="1269331"/>
-            </a:xfrm>
-            <a:prstGeom prst="rect">
-              <a:avLst/>
-            </a:prstGeom>
-            <a:solidFill>
-              <a:schemeClr val="accent6">
-                <a:lumMod val="75000"/>
-              </a:schemeClr>
-            </a:solidFill>
-          </p:spPr>
-          <p:style>
-            <a:lnRef idx="2">
-              <a:schemeClr val="accent1">
-                <a:shade val="15000"/>
-              </a:schemeClr>
-            </a:lnRef>
-            <a:fillRef idx="1">
-              <a:schemeClr val="accent1"/>
-            </a:fillRef>
-            <a:effectRef idx="0">
-              <a:schemeClr val="accent1"/>
-            </a:effectRef>
-            <a:fontRef idx="minor">
-              <a:schemeClr val="lt1"/>
-            </a:fontRef>
-          </p:style>
-          <p:txBody>
-            <a:bodyPr rtlCol="0" anchor="ctr"/>
-            <a:lstStyle/>
-            <a:p>
-              <a:pPr algn="ctr"/>
-              <a:endParaRPr lang="en-US" altLang="ko-KR" dirty="0"/>
-            </a:p>
-            <a:p>
-              <a:pPr algn="ctr"/>
-              <a:r>
-                <a:rPr lang="en-US" altLang="ko-KR" dirty="0"/>
-                <a:t>Zone</a:t>
-              </a:r>
-              <a:endParaRPr lang="ko-KR" altLang="en-US" dirty="0"/>
-            </a:p>
-            <a:p>
-              <a:pPr algn="ctr"/>
-              <a:endParaRPr lang="ko-KR" altLang="en-US" dirty="0"/>
-            </a:p>
-          </p:txBody>
-        </p:sp>
-        <p:sp>
-          <p:nvSpPr>
-            <p:cNvPr id="10" name="직사각형 9">
-              <a:extLst>
-                <a:ext uri="{FF2B5EF4-FFF2-40B4-BE49-F238E27FC236}">
-                  <a16:creationId xmlns:a16="http://schemas.microsoft.com/office/drawing/2014/main" id="{8A256F06-4621-1C57-BA22-07E1C2F6F54B}"/>
-                </a:ext>
-              </a:extLst>
-            </p:cNvPr>
-            <p:cNvSpPr/>
-            <p:nvPr/>
-          </p:nvSpPr>
-          <p:spPr>
-            <a:xfrm>
-              <a:off x="5018171" y="4632158"/>
-              <a:ext cx="2947737" cy="1269331"/>
-            </a:xfrm>
-            <a:prstGeom prst="rect">
-              <a:avLst/>
-            </a:prstGeom>
-            <a:solidFill>
-              <a:schemeClr val="accent6">
-                <a:lumMod val="75000"/>
-              </a:schemeClr>
-            </a:solidFill>
-          </p:spPr>
-          <p:style>
-            <a:lnRef idx="2">
-              <a:schemeClr val="accent1">
-                <a:shade val="15000"/>
-              </a:schemeClr>
-            </a:lnRef>
-            <a:fillRef idx="1">
-              <a:schemeClr val="accent1"/>
-            </a:fillRef>
-            <a:effectRef idx="0">
-              <a:schemeClr val="accent1"/>
-            </a:effectRef>
-            <a:fontRef idx="minor">
-              <a:schemeClr val="lt1"/>
-            </a:fontRef>
-          </p:style>
-          <p:txBody>
-            <a:bodyPr rtlCol="0" anchor="ctr"/>
-            <a:lstStyle/>
-            <a:p>
-              <a:pPr algn="ctr"/>
-              <a:endParaRPr lang="en-US" altLang="ko-KR" dirty="0"/>
-            </a:p>
-            <a:p>
-              <a:pPr algn="ctr"/>
-              <a:r>
-                <a:rPr lang="en-US" altLang="ko-KR" dirty="0"/>
-                <a:t>Zone</a:t>
-              </a:r>
-              <a:endParaRPr lang="ko-KR" altLang="en-US" dirty="0"/>
-            </a:p>
-            <a:p>
-              <a:pPr algn="ctr"/>
-              <a:endParaRPr lang="ko-KR" altLang="en-US" dirty="0"/>
-            </a:p>
-          </p:txBody>
-        </p:sp>
-        <p:sp>
-          <p:nvSpPr>
-            <p:cNvPr id="11" name="직사각형 10">
-              <a:extLst>
-                <a:ext uri="{FF2B5EF4-FFF2-40B4-BE49-F238E27FC236}">
-                  <a16:creationId xmlns:a16="http://schemas.microsoft.com/office/drawing/2014/main" id="{3359322B-B3FD-686F-AD7A-8EFE35B3CA49}"/>
-                </a:ext>
-              </a:extLst>
-            </p:cNvPr>
-            <p:cNvSpPr/>
-            <p:nvPr/>
-          </p:nvSpPr>
-          <p:spPr>
-            <a:xfrm>
-              <a:off x="1678405" y="3007895"/>
-              <a:ext cx="1263316" cy="421105"/>
-            </a:xfrm>
-            <a:prstGeom prst="rect">
-              <a:avLst/>
-            </a:prstGeom>
-          </p:spPr>
-          <p:style>
-            <a:lnRef idx="2">
-              <a:schemeClr val="accent1">
-                <a:shade val="15000"/>
-              </a:schemeClr>
-            </a:lnRef>
-            <a:fillRef idx="1">
-              <a:schemeClr val="accent1"/>
-            </a:fillRef>
-            <a:effectRef idx="0">
-              <a:schemeClr val="accent1"/>
-            </a:effectRef>
-            <a:fontRef idx="minor">
-              <a:schemeClr val="lt1"/>
-            </a:fontRef>
-          </p:style>
-          <p:txBody>
-            <a:bodyPr rtlCol="0" anchor="ctr"/>
-            <a:lstStyle/>
-            <a:p>
-              <a:pPr algn="ctr"/>
-              <a:r>
-                <a:rPr lang="en-US" altLang="ko-KR" dirty="0"/>
-                <a:t>Section</a:t>
-              </a:r>
-              <a:endParaRPr lang="ko-KR" altLang="en-US" dirty="0"/>
-            </a:p>
-          </p:txBody>
-        </p:sp>
-        <p:sp>
-          <p:nvSpPr>
-            <p:cNvPr id="12" name="직사각형 11">
-              <a:extLst>
-                <a:ext uri="{FF2B5EF4-FFF2-40B4-BE49-F238E27FC236}">
-                  <a16:creationId xmlns:a16="http://schemas.microsoft.com/office/drawing/2014/main" id="{B16918CF-776E-B372-76C4-71D7A89C1C2B}"/>
-                </a:ext>
-              </a:extLst>
-            </p:cNvPr>
-            <p:cNvSpPr/>
-            <p:nvPr/>
-          </p:nvSpPr>
-          <p:spPr>
-            <a:xfrm>
-              <a:off x="3043989" y="3007895"/>
-              <a:ext cx="1263316" cy="421105"/>
-            </a:xfrm>
-            <a:prstGeom prst="rect">
-              <a:avLst/>
-            </a:prstGeom>
-          </p:spPr>
-          <p:style>
-            <a:lnRef idx="2">
-              <a:schemeClr val="accent1">
-                <a:shade val="15000"/>
-              </a:schemeClr>
-            </a:lnRef>
-            <a:fillRef idx="1">
-              <a:schemeClr val="accent1"/>
-            </a:fillRef>
-            <a:effectRef idx="0">
-              <a:schemeClr val="accent1"/>
-            </a:effectRef>
-            <a:fontRef idx="minor">
-              <a:schemeClr val="lt1"/>
-            </a:fontRef>
-          </p:style>
-          <p:txBody>
-            <a:bodyPr rtlCol="0" anchor="ctr"/>
-            <a:lstStyle/>
-            <a:p>
-              <a:pPr algn="ctr"/>
-              <a:r>
-                <a:rPr lang="en-US" altLang="ko-KR" dirty="0"/>
-                <a:t>Section</a:t>
-              </a:r>
-              <a:endParaRPr lang="ko-KR" altLang="en-US" dirty="0"/>
-            </a:p>
-          </p:txBody>
-        </p:sp>
-        <p:sp>
-          <p:nvSpPr>
-            <p:cNvPr id="13" name="직사각형 12">
-              <a:extLst>
-                <a:ext uri="{FF2B5EF4-FFF2-40B4-BE49-F238E27FC236}">
-                  <a16:creationId xmlns:a16="http://schemas.microsoft.com/office/drawing/2014/main" id="{64ED1231-02A3-D269-05D2-BAED1ECB5938}"/>
-                </a:ext>
-              </a:extLst>
-            </p:cNvPr>
-            <p:cNvSpPr/>
-            <p:nvPr/>
-          </p:nvSpPr>
-          <p:spPr>
-            <a:xfrm>
-              <a:off x="1678405" y="3537285"/>
-              <a:ext cx="1263316" cy="421105"/>
-            </a:xfrm>
-            <a:prstGeom prst="rect">
-              <a:avLst/>
-            </a:prstGeom>
-          </p:spPr>
-          <p:style>
-            <a:lnRef idx="2">
-              <a:schemeClr val="accent1">
-                <a:shade val="15000"/>
-              </a:schemeClr>
-            </a:lnRef>
-            <a:fillRef idx="1">
-              <a:schemeClr val="accent1"/>
-            </a:fillRef>
-            <a:effectRef idx="0">
-              <a:schemeClr val="accent1"/>
-            </a:effectRef>
-            <a:fontRef idx="minor">
-              <a:schemeClr val="lt1"/>
-            </a:fontRef>
-          </p:style>
-          <p:txBody>
-            <a:bodyPr rtlCol="0" anchor="ctr"/>
-            <a:lstStyle/>
-            <a:p>
-              <a:pPr algn="ctr"/>
-              <a:r>
-                <a:rPr lang="en-US" altLang="ko-KR" dirty="0"/>
-                <a:t>Section</a:t>
-              </a:r>
-              <a:endParaRPr lang="ko-KR" altLang="en-US" dirty="0"/>
-            </a:p>
-          </p:txBody>
-        </p:sp>
-        <p:sp>
-          <p:nvSpPr>
-            <p:cNvPr id="14" name="직사각형 13">
-              <a:extLst>
-                <a:ext uri="{FF2B5EF4-FFF2-40B4-BE49-F238E27FC236}">
-                  <a16:creationId xmlns:a16="http://schemas.microsoft.com/office/drawing/2014/main" id="{E6C5F0E2-5BEA-88DB-3D7F-8F8E11758781}"/>
-                </a:ext>
-              </a:extLst>
-            </p:cNvPr>
-            <p:cNvSpPr/>
-            <p:nvPr/>
-          </p:nvSpPr>
-          <p:spPr>
-            <a:xfrm>
-              <a:off x="3043989" y="3537285"/>
-              <a:ext cx="1263316" cy="421105"/>
-            </a:xfrm>
-            <a:prstGeom prst="rect">
-              <a:avLst/>
-            </a:prstGeom>
-          </p:spPr>
-          <p:style>
-            <a:lnRef idx="2">
-              <a:schemeClr val="accent1">
-                <a:shade val="15000"/>
-              </a:schemeClr>
-            </a:lnRef>
-            <a:fillRef idx="1">
-              <a:schemeClr val="accent1"/>
-            </a:fillRef>
-            <a:effectRef idx="0">
-              <a:schemeClr val="accent1"/>
-            </a:effectRef>
-            <a:fontRef idx="minor">
-              <a:schemeClr val="lt1"/>
-            </a:fontRef>
-          </p:style>
-          <p:txBody>
-            <a:bodyPr rtlCol="0" anchor="ctr"/>
-            <a:lstStyle/>
-            <a:p>
-              <a:pPr algn="ctr"/>
-              <a:r>
-                <a:rPr lang="en-US" altLang="ko-KR" dirty="0"/>
-                <a:t>Section</a:t>
-              </a:r>
-              <a:endParaRPr lang="ko-KR" altLang="en-US" dirty="0"/>
-            </a:p>
-          </p:txBody>
-        </p:sp>
-      </p:grpSp>
-    </p:spTree>
-    <p:extLst>
-      <p:ext uri="{BB962C8B-B14F-4D97-AF65-F5344CB8AC3E}">
-        <p14:creationId xmlns:p14="http://schemas.microsoft.com/office/powerpoint/2010/main" val="595865189"/>
-      </p:ext>
-    </p:extLst>
-  </p:cSld>
-  <p:clrMapOvr>
-    <a:masterClrMapping/>
-  </p:clrMapOvr>
-</p:sld>
-</file>
-
-<file path=ppt/slides/slide8.xml><?xml version="1.0" encoding="utf-8"?>
-<p:sld xmlns:a="http://schemas.openxmlformats.org/drawingml/2006/main" xmlns:r="http://schemas.openxmlformats.org/officeDocument/2006/relationships" xmlns:p="http://schemas.openxmlformats.org/presentationml/2006/main">
-  <p:cSld>
-    <p:spTree>
-      <p:nvGrpSpPr>
-        <p:cNvPr id="1" name=""/>
-        <p:cNvGrpSpPr/>
-        <p:nvPr/>
-      </p:nvGrpSpPr>
-      <p:grpSpPr>
-        <a:xfrm>
-          <a:off x="0" y="0"/>
-          <a:ext cx="0" cy="0"/>
-          <a:chOff x="0" y="0"/>
-          <a:chExt cx="0" cy="0"/>
-        </a:xfrm>
-      </p:grpSpPr>
-      <p:sp>
-        <p:nvSpPr>
-          <p:cNvPr id="2" name="제목 1">
-            <a:extLst>
-              <a:ext uri="{FF2B5EF4-FFF2-40B4-BE49-F238E27FC236}">
-                <a16:creationId xmlns:a16="http://schemas.microsoft.com/office/drawing/2014/main" id="{F8670FA3-A026-6285-02E3-4AF1E6F9D250}"/>
-              </a:ext>
-            </a:extLst>
-          </p:cNvPr>
-          <p:cNvSpPr>
-            <a:spLocks noGrp="1"/>
-          </p:cNvSpPr>
-          <p:nvPr>
-            <p:ph type="title"/>
-          </p:nvPr>
-        </p:nvSpPr>
-        <p:spPr/>
-        <p:txBody>
-          <a:bodyPr/>
-          <a:lstStyle/>
-          <a:p>
-            <a:r>
-              <a:rPr lang="ko-KR" altLang="en-US" dirty="0"/>
-              <a:t>플레이어 시야</a:t>
-            </a:r>
-            <a:r>
-              <a:rPr lang="en-US" altLang="ko-KR" dirty="0"/>
-              <a:t>(Viewport)</a:t>
-            </a:r>
-            <a:endParaRPr lang="ko-KR" altLang="en-US" dirty="0"/>
-          </a:p>
-        </p:txBody>
-      </p:sp>
-      <p:sp>
-        <p:nvSpPr>
-          <p:cNvPr id="3" name="내용 개체 틀 2">
-            <a:extLst>
-              <a:ext uri="{FF2B5EF4-FFF2-40B4-BE49-F238E27FC236}">
-                <a16:creationId xmlns:a16="http://schemas.microsoft.com/office/drawing/2014/main" id="{1199AB70-29D5-F7DF-F69E-E072E982A63F}"/>
-              </a:ext>
-            </a:extLst>
-          </p:cNvPr>
-          <p:cNvSpPr>
-            <a:spLocks noGrp="1"/>
-          </p:cNvSpPr>
-          <p:nvPr>
-            <p:ph idx="1"/>
-          </p:nvPr>
-        </p:nvSpPr>
-        <p:spPr/>
-        <p:txBody>
-          <a:bodyPr/>
-          <a:lstStyle/>
-          <a:p>
-            <a:r>
-              <a:rPr lang="ko-KR" altLang="en-US" dirty="0" err="1"/>
-              <a:t>패킷전송을</a:t>
-            </a:r>
-            <a:r>
-              <a:rPr lang="ko-KR" altLang="en-US" dirty="0"/>
-              <a:t> 최소화 시키기 위해 플레이어는 시야를 보유</a:t>
-            </a:r>
-            <a:endParaRPr lang="en-US" altLang="ko-KR" dirty="0"/>
-          </a:p>
-          <a:p>
-            <a:r>
-              <a:rPr lang="ko-KR" altLang="en-US" dirty="0"/>
-              <a:t>시야 내부에 들어오거나 밖으로 나간 액터들을 주기적으로 계산하여</a:t>
-            </a:r>
-            <a:r>
-              <a:rPr lang="en-US" altLang="ko-KR" dirty="0"/>
-              <a:t>(0.2</a:t>
-            </a:r>
-            <a:r>
-              <a:rPr lang="ko-KR" altLang="en-US" dirty="0"/>
-              <a:t>초</a:t>
-            </a:r>
-            <a:r>
-              <a:rPr lang="en-US" altLang="ko-KR" dirty="0"/>
-              <a:t>) </a:t>
-            </a:r>
-            <a:r>
-              <a:rPr lang="ko-KR" altLang="en-US" dirty="0" err="1"/>
-              <a:t>클라에게</a:t>
-            </a:r>
-            <a:r>
-              <a:rPr lang="ko-KR" altLang="en-US" dirty="0"/>
-              <a:t> 화면에 </a:t>
-            </a:r>
-            <a:endParaRPr lang="en-US" altLang="ko-KR" dirty="0"/>
-          </a:p>
-          <a:p>
-            <a:pPr marL="0" indent="0">
-              <a:buNone/>
-            </a:pPr>
-            <a:r>
-              <a:rPr lang="en-US" altLang="ko-KR" dirty="0"/>
-              <a:t>   </a:t>
-            </a:r>
-            <a:r>
-              <a:rPr lang="ko-KR" altLang="en-US" dirty="0"/>
-              <a:t>렌더링 할 대상들을 전송</a:t>
-            </a:r>
-            <a:endParaRPr lang="en-US" altLang="ko-KR" dirty="0"/>
-          </a:p>
-          <a:p>
-            <a:r>
-              <a:rPr lang="ko-KR" altLang="en-US" dirty="0"/>
-              <a:t>시야를 업데이트 </a:t>
-            </a:r>
-            <a:r>
-              <a:rPr lang="ko-KR" altLang="en-US" dirty="0" err="1"/>
-              <a:t>할때</a:t>
-            </a:r>
-            <a:r>
-              <a:rPr lang="ko-KR" altLang="en-US" dirty="0"/>
-              <a:t> 주변의 </a:t>
-            </a:r>
-            <a:r>
-              <a:rPr lang="en-US" altLang="ko-KR" dirty="0"/>
-              <a:t>Section</a:t>
-            </a:r>
-            <a:r>
-              <a:rPr lang="ko-KR" altLang="en-US" dirty="0"/>
-              <a:t>들을 검사해서 판별</a:t>
-            </a:r>
-          </a:p>
-        </p:txBody>
-      </p:sp>
-      <p:pic>
-        <p:nvPicPr>
-          <p:cNvPr id="5" name="그림 4">
-            <a:extLst>
-              <a:ext uri="{FF2B5EF4-FFF2-40B4-BE49-F238E27FC236}">
-                <a16:creationId xmlns:a16="http://schemas.microsoft.com/office/drawing/2014/main" id="{B850969D-A2CA-4D5D-B3F1-0C3B681F6590}"/>
-              </a:ext>
-            </a:extLst>
-          </p:cNvPr>
-          <p:cNvPicPr>
-            <a:picLocks noChangeAspect="1"/>
-          </p:cNvPicPr>
-          <p:nvPr/>
-        </p:nvPicPr>
-        <p:blipFill>
-          <a:blip r:embed="rId2"/>
-          <a:stretch>
-            <a:fillRect/>
-          </a:stretch>
-        </p:blipFill>
-        <p:spPr>
-          <a:xfrm>
-            <a:off x="1467853" y="3618600"/>
-            <a:ext cx="3197445" cy="2499458"/>
-          </a:xfrm>
-          <a:prstGeom prst="rect">
-            <a:avLst/>
-          </a:prstGeom>
-        </p:spPr>
-      </p:pic>
-      <p:sp>
-        <p:nvSpPr>
-          <p:cNvPr id="6" name="TextBox 5">
-            <a:extLst>
-              <a:ext uri="{FF2B5EF4-FFF2-40B4-BE49-F238E27FC236}">
-                <a16:creationId xmlns:a16="http://schemas.microsoft.com/office/drawing/2014/main" id="{CE892593-1FEB-07A4-1E93-D6F359441715}"/>
-              </a:ext>
-            </a:extLst>
-          </p:cNvPr>
-          <p:cNvSpPr txBox="1"/>
-          <p:nvPr/>
-        </p:nvSpPr>
-        <p:spPr>
-          <a:xfrm>
-            <a:off x="2695072" y="6118058"/>
-            <a:ext cx="2051385" cy="369332"/>
-          </a:xfrm>
-          <a:prstGeom prst="rect">
-            <a:avLst/>
-          </a:prstGeom>
-          <a:noFill/>
-        </p:spPr>
-        <p:txBody>
-          <a:bodyPr wrap="square" rtlCol="0">
-            <a:spAutoFit/>
-          </a:bodyPr>
-          <a:lstStyle/>
-          <a:p>
-            <a:r>
-              <a:rPr lang="en-US" altLang="ko-KR" dirty="0"/>
-              <a:t>Viewport Size = 1</a:t>
-            </a:r>
-            <a:endParaRPr lang="ko-KR" altLang="en-US" dirty="0"/>
-          </a:p>
-        </p:txBody>
-      </p:sp>
-      <p:pic>
-        <p:nvPicPr>
-          <p:cNvPr id="8" name="그림 7">
-            <a:extLst>
-              <a:ext uri="{FF2B5EF4-FFF2-40B4-BE49-F238E27FC236}">
-                <a16:creationId xmlns:a16="http://schemas.microsoft.com/office/drawing/2014/main" id="{DCC22C15-5887-B0D2-8615-07FF2A00C015}"/>
-              </a:ext>
-            </a:extLst>
-          </p:cNvPr>
-          <p:cNvPicPr>
-            <a:picLocks noChangeAspect="1"/>
-          </p:cNvPicPr>
-          <p:nvPr/>
-        </p:nvPicPr>
-        <p:blipFill>
-          <a:blip r:embed="rId3"/>
-          <a:stretch>
-            <a:fillRect/>
-          </a:stretch>
-        </p:blipFill>
-        <p:spPr>
-          <a:xfrm>
-            <a:off x="6894095" y="3618600"/>
-            <a:ext cx="3197445" cy="2499458"/>
-          </a:xfrm>
-          <a:prstGeom prst="rect">
-            <a:avLst/>
-          </a:prstGeom>
-        </p:spPr>
-      </p:pic>
-      <p:sp>
-        <p:nvSpPr>
-          <p:cNvPr id="9" name="TextBox 8">
-            <a:extLst>
-              <a:ext uri="{FF2B5EF4-FFF2-40B4-BE49-F238E27FC236}">
-                <a16:creationId xmlns:a16="http://schemas.microsoft.com/office/drawing/2014/main" id="{E4B0E1E0-A723-103F-EC3E-9591C5A598E0}"/>
-              </a:ext>
-            </a:extLst>
-          </p:cNvPr>
-          <p:cNvSpPr txBox="1"/>
-          <p:nvPr/>
-        </p:nvSpPr>
-        <p:spPr>
-          <a:xfrm>
-            <a:off x="7988969" y="6118058"/>
-            <a:ext cx="2177715" cy="369332"/>
-          </a:xfrm>
-          <a:prstGeom prst="rect">
-            <a:avLst/>
-          </a:prstGeom>
-          <a:noFill/>
-        </p:spPr>
-        <p:txBody>
-          <a:bodyPr wrap="square" rtlCol="0">
-            <a:spAutoFit/>
-          </a:bodyPr>
-          <a:lstStyle/>
-          <a:p>
-            <a:r>
-              <a:rPr lang="en-US" altLang="ko-KR" dirty="0"/>
-              <a:t>Viewport Size = 10</a:t>
-            </a:r>
-            <a:endParaRPr lang="ko-KR" altLang="en-US" dirty="0"/>
-          </a:p>
-        </p:txBody>
-      </p:sp>
-    </p:spTree>
-    <p:extLst>
-      <p:ext uri="{BB962C8B-B14F-4D97-AF65-F5344CB8AC3E}">
-        <p14:creationId xmlns:p14="http://schemas.microsoft.com/office/powerpoint/2010/main" val="3106104575"/>
-      </p:ext>
-    </p:extLst>
-  </p:cSld>
-  <p:clrMapOvr>
-    <a:masterClrMapping/>
-  </p:clrMapOvr>
-</p:sld>
-</file>
-
-<file path=ppt/slides/slide9.xml><?xml version="1.0" encoding="utf-8"?>
-<p:sld xmlns:a="http://schemas.openxmlformats.org/drawingml/2006/main" xmlns:r="http://schemas.openxmlformats.org/officeDocument/2006/relationships" xmlns:p="http://schemas.openxmlformats.org/presentationml/2006/main">
-  <p:cSld>
-    <p:spTree>
-      <p:nvGrpSpPr>
-        <p:cNvPr id="1" name=""/>
-        <p:cNvGrpSpPr/>
-        <p:nvPr/>
-      </p:nvGrpSpPr>
-      <p:grpSpPr>
-        <a:xfrm>
-          <a:off x="0" y="0"/>
-          <a:ext cx="0" cy="0"/>
-          <a:chOff x="0" y="0"/>
-          <a:chExt cx="0" cy="0"/>
-        </a:xfrm>
-      </p:grpSpPr>
-      <p:sp>
-        <p:nvSpPr>
-          <p:cNvPr id="2" name="제목 1">
-            <a:extLst>
-              <a:ext uri="{FF2B5EF4-FFF2-40B4-BE49-F238E27FC236}">
-                <a16:creationId xmlns:a16="http://schemas.microsoft.com/office/drawing/2014/main" id="{C72DA812-F3D2-2397-E7ED-CDCB42E3C901}"/>
-              </a:ext>
-            </a:extLst>
-          </p:cNvPr>
-          <p:cNvSpPr>
-            <a:spLocks noGrp="1"/>
-          </p:cNvSpPr>
-          <p:nvPr>
-            <p:ph type="title"/>
-          </p:nvPr>
-        </p:nvSpPr>
-        <p:spPr/>
-        <p:txBody>
-          <a:bodyPr/>
-          <a:lstStyle/>
-          <a:p>
-            <a:r>
-              <a:rPr lang="ko-KR" altLang="en-US" dirty="0"/>
-              <a:t>몬스터 </a:t>
-            </a:r>
-            <a:r>
-              <a:rPr lang="en-US" altLang="ko-KR" dirty="0"/>
-              <a:t>AI</a:t>
-            </a:r>
-            <a:endParaRPr lang="ko-KR" altLang="en-US" dirty="0"/>
-          </a:p>
-        </p:txBody>
-      </p:sp>
-      <p:sp>
-        <p:nvSpPr>
-          <p:cNvPr id="3" name="내용 개체 틀 2">
-            <a:extLst>
-              <a:ext uri="{FF2B5EF4-FFF2-40B4-BE49-F238E27FC236}">
-                <a16:creationId xmlns:a16="http://schemas.microsoft.com/office/drawing/2014/main" id="{69EAC548-3D33-145F-602A-3D0506809C5B}"/>
-              </a:ext>
-            </a:extLst>
-          </p:cNvPr>
-          <p:cNvSpPr>
-            <a:spLocks noGrp="1"/>
-          </p:cNvSpPr>
-          <p:nvPr>
-            <p:ph idx="1"/>
-          </p:nvPr>
-        </p:nvSpPr>
-        <p:spPr>
-          <a:xfrm>
-            <a:off x="1066800" y="2103120"/>
-            <a:ext cx="10058400" cy="585938"/>
-          </a:xfrm>
-        </p:spPr>
-        <p:txBody>
-          <a:bodyPr/>
-          <a:lstStyle/>
-          <a:p>
-            <a:r>
-              <a:rPr lang="ko-KR" altLang="en-US" dirty="0"/>
-              <a:t>몬스터는 </a:t>
-            </a:r>
-            <a:r>
-              <a:rPr lang="en-US" altLang="ko-KR" dirty="0"/>
-              <a:t>IDLE, MOVING, CHASING, SKILL, DEATH </a:t>
-            </a:r>
-            <a:r>
-              <a:rPr lang="ko-KR" altLang="en-US" dirty="0"/>
-              <a:t>상태를 갖고 있습니다</a:t>
-            </a:r>
-          </a:p>
-        </p:txBody>
-      </p:sp>
-      <p:sp>
-        <p:nvSpPr>
-          <p:cNvPr id="4" name="날짜 개체 틀 3">
-            <a:extLst>
-              <a:ext uri="{FF2B5EF4-FFF2-40B4-BE49-F238E27FC236}">
-                <a16:creationId xmlns:a16="http://schemas.microsoft.com/office/drawing/2014/main" id="{1889FE68-6A70-D6D5-EA0C-4CC1A93F8F95}"/>
-              </a:ext>
-            </a:extLst>
-          </p:cNvPr>
-          <p:cNvSpPr>
-            <a:spLocks noGrp="1"/>
-          </p:cNvSpPr>
-          <p:nvPr>
-            <p:ph type="dt" sz="half" idx="10"/>
-          </p:nvPr>
-        </p:nvSpPr>
-        <p:spPr/>
-        <p:txBody>
-          <a:bodyPr/>
-          <a:lstStyle/>
-          <a:p>
-            <a:fld id="{2EABA43C-120F-4415-98B3-372D2FECC855}" type="datetime1">
-              <a:rPr lang="ko-KR" altLang="en-US" smtClean="0"/>
-              <a:t>2025-09-02</a:t>
-            </a:fld>
-            <a:endParaRPr lang="en-US"/>
-          </a:p>
-        </p:txBody>
-      </p:sp>
-      <p:grpSp>
-        <p:nvGrpSpPr>
-          <p:cNvPr id="23" name="그룹 22">
-            <a:extLst>
-              <a:ext uri="{FF2B5EF4-FFF2-40B4-BE49-F238E27FC236}">
-                <a16:creationId xmlns:a16="http://schemas.microsoft.com/office/drawing/2014/main" id="{9CCB8A8A-0827-8EB3-8E67-354A2488CD73}"/>
-              </a:ext>
-            </a:extLst>
-          </p:cNvPr>
-          <p:cNvGrpSpPr/>
-          <p:nvPr/>
-        </p:nvGrpSpPr>
-        <p:grpSpPr>
-          <a:xfrm>
-            <a:off x="1864894" y="2897204"/>
+            <a:off x="1321784" y="2385279"/>
             <a:ext cx="5132471" cy="2929689"/>
             <a:chOff x="2580773" y="2947737"/>
             <a:chExt cx="5132471" cy="2929689"/>
@@ -13082,10 +11997,10 @@
         </p:grpSpPr>
         <p:sp>
           <p:nvSpPr>
-            <p:cNvPr id="5" name="직사각형 4">
+            <p:cNvPr id="6" name="직사각형 5">
               <a:extLst>
                 <a:ext uri="{FF2B5EF4-FFF2-40B4-BE49-F238E27FC236}">
-                  <a16:creationId xmlns:a16="http://schemas.microsoft.com/office/drawing/2014/main" id="{67801C8F-13B3-8ABD-9324-EC3C6C6EB491}"/>
+                  <a16:creationId xmlns:a16="http://schemas.microsoft.com/office/drawing/2014/main" id="{D11F78BC-1EFF-DADD-FC88-3A6408FCE645}"/>
                 </a:ext>
               </a:extLst>
             </p:cNvPr>
@@ -13124,7 +12039,7 @@
               <a:pPr algn="ctr"/>
               <a:r>
                 <a:rPr lang="en-US" altLang="ko-KR" dirty="0"/>
-                <a:t>IDLE</a:t>
+                <a:t>Waiting</a:t>
               </a:r>
               <a:endParaRPr lang="ko-KR" altLang="en-US" dirty="0"/>
             </a:p>
@@ -13132,10 +12047,10 @@
         </p:sp>
         <p:sp>
           <p:nvSpPr>
-            <p:cNvPr id="6" name="직사각형 5">
+            <p:cNvPr id="16" name="직사각형 15">
               <a:extLst>
                 <a:ext uri="{FF2B5EF4-FFF2-40B4-BE49-F238E27FC236}">
-                  <a16:creationId xmlns:a16="http://schemas.microsoft.com/office/drawing/2014/main" id="{E45B7A71-0685-B6A2-192F-163155D7AA59}"/>
+                  <a16:creationId xmlns:a16="http://schemas.microsoft.com/office/drawing/2014/main" id="{BF0BA6FB-40E3-2A9C-9DD4-AAD5F3518108}"/>
                 </a:ext>
               </a:extLst>
             </p:cNvPr>
@@ -13173,8 +12088,8 @@
             <a:p>
               <a:pPr algn="ctr"/>
               <a:r>
-                <a:rPr lang="en-US" altLang="ko-KR" dirty="0"/>
-                <a:t>MOVING</a:t>
+                <a:rPr lang="en-US" altLang="ko-KR" dirty="0" err="1"/>
+                <a:t>PreStart</a:t>
               </a:r>
               <a:endParaRPr lang="ko-KR" altLang="en-US" dirty="0"/>
             </a:p>
@@ -13182,10 +12097,10 @@
         </p:sp>
         <p:sp>
           <p:nvSpPr>
-            <p:cNvPr id="7" name="직사각형 6">
+            <p:cNvPr id="17" name="직사각형 16">
               <a:extLst>
                 <a:ext uri="{FF2B5EF4-FFF2-40B4-BE49-F238E27FC236}">
-                  <a16:creationId xmlns:a16="http://schemas.microsoft.com/office/drawing/2014/main" id="{0AF8122E-7E7A-6AB9-012F-6A59F537C1DF}"/>
+                  <a16:creationId xmlns:a16="http://schemas.microsoft.com/office/drawing/2014/main" id="{404F0A9F-D0B0-37D8-66E8-D0ACABFAF648}"/>
                 </a:ext>
               </a:extLst>
             </p:cNvPr>
@@ -13224,7 +12139,7 @@
               <a:pPr algn="ctr"/>
               <a:r>
                 <a:rPr lang="en-US" altLang="ko-KR" dirty="0"/>
-                <a:t>CHASING</a:t>
+                <a:t>End</a:t>
               </a:r>
               <a:endParaRPr lang="ko-KR" altLang="en-US" dirty="0"/>
             </a:p>
@@ -13232,10 +12147,10 @@
         </p:sp>
         <p:sp>
           <p:nvSpPr>
-            <p:cNvPr id="10" name="직사각형 9">
+            <p:cNvPr id="18" name="직사각형 17">
               <a:extLst>
                 <a:ext uri="{FF2B5EF4-FFF2-40B4-BE49-F238E27FC236}">
-                  <a16:creationId xmlns:a16="http://schemas.microsoft.com/office/drawing/2014/main" id="{80B3A5C1-7258-9A2E-6DC9-66564A590093}"/>
+                  <a16:creationId xmlns:a16="http://schemas.microsoft.com/office/drawing/2014/main" id="{6B2BB32A-FFCC-7FC0-5A23-3745E038206D}"/>
                 </a:ext>
               </a:extLst>
             </p:cNvPr>
@@ -13274,479 +12189,19 @@
               <a:pPr algn="ctr"/>
               <a:r>
                 <a:rPr lang="en-US" altLang="ko-KR" dirty="0"/>
-                <a:t>SKILL</a:t>
+                <a:t>Start</a:t>
               </a:r>
               <a:endParaRPr lang="ko-KR" altLang="en-US" dirty="0"/>
             </a:p>
           </p:txBody>
         </p:sp>
-        <p:cxnSp>
-          <p:nvCxnSpPr>
-            <p:cNvPr id="12" name="직선 화살표 연결선 11">
-              <a:extLst>
-                <a:ext uri="{FF2B5EF4-FFF2-40B4-BE49-F238E27FC236}">
-                  <a16:creationId xmlns:a16="http://schemas.microsoft.com/office/drawing/2014/main" id="{D9FF099E-EB95-7766-B733-4C39041C285C}"/>
-                </a:ext>
-              </a:extLst>
-            </p:cNvPr>
-            <p:cNvCxnSpPr/>
-            <p:nvPr/>
-          </p:nvCxnSpPr>
-          <p:spPr>
-            <a:xfrm>
-              <a:off x="4301288" y="3248526"/>
-              <a:ext cx="1691441" cy="0"/>
-            </a:xfrm>
-            <a:prstGeom prst="straightConnector1">
-              <a:avLst/>
-            </a:prstGeom>
-            <a:ln>
-              <a:tailEnd type="triangle"/>
-            </a:ln>
-          </p:spPr>
-          <p:style>
-            <a:lnRef idx="1">
-              <a:schemeClr val="dk1"/>
-            </a:lnRef>
-            <a:fillRef idx="0">
-              <a:schemeClr val="dk1"/>
-            </a:fillRef>
-            <a:effectRef idx="0">
-              <a:schemeClr val="dk1"/>
-            </a:effectRef>
-            <a:fontRef idx="minor">
-              <a:schemeClr val="tx1"/>
-            </a:fontRef>
-          </p:style>
-        </p:cxnSp>
-        <p:cxnSp>
-          <p:nvCxnSpPr>
-            <p:cNvPr id="14" name="직선 화살표 연결선 13">
-              <a:extLst>
-                <a:ext uri="{FF2B5EF4-FFF2-40B4-BE49-F238E27FC236}">
-                  <a16:creationId xmlns:a16="http://schemas.microsoft.com/office/drawing/2014/main" id="{8D1171FB-7070-3A2F-93F5-EFC8C427FAA7}"/>
-                </a:ext>
-              </a:extLst>
-            </p:cNvPr>
-            <p:cNvCxnSpPr/>
-            <p:nvPr/>
-          </p:nvCxnSpPr>
-          <p:spPr>
-            <a:xfrm flipH="1">
-              <a:off x="4301288" y="3549316"/>
-              <a:ext cx="1691441" cy="0"/>
-            </a:xfrm>
-            <a:prstGeom prst="straightConnector1">
-              <a:avLst/>
-            </a:prstGeom>
-            <a:ln>
-              <a:tailEnd type="triangle"/>
-            </a:ln>
-          </p:spPr>
-          <p:style>
-            <a:lnRef idx="1">
-              <a:schemeClr val="dk1"/>
-            </a:lnRef>
-            <a:fillRef idx="0">
-              <a:schemeClr val="dk1"/>
-            </a:fillRef>
-            <a:effectRef idx="0">
-              <a:schemeClr val="dk1"/>
-            </a:effectRef>
-            <a:fontRef idx="minor">
-              <a:schemeClr val="tx1"/>
-            </a:fontRef>
-          </p:style>
-        </p:cxnSp>
-        <p:cxnSp>
-          <p:nvCxnSpPr>
-            <p:cNvPr id="16" name="직선 화살표 연결선 15">
-              <a:extLst>
-                <a:ext uri="{FF2B5EF4-FFF2-40B4-BE49-F238E27FC236}">
-                  <a16:creationId xmlns:a16="http://schemas.microsoft.com/office/drawing/2014/main" id="{045FB17A-97B3-BE52-9F7C-132DE1EE425B}"/>
-                </a:ext>
-              </a:extLst>
-            </p:cNvPr>
-            <p:cNvCxnSpPr/>
-            <p:nvPr/>
-          </p:nvCxnSpPr>
-          <p:spPr>
-            <a:xfrm flipH="1">
-              <a:off x="3561347" y="3651584"/>
-              <a:ext cx="2431382" cy="1263316"/>
-            </a:xfrm>
-            <a:prstGeom prst="straightConnector1">
-              <a:avLst/>
-            </a:prstGeom>
-            <a:ln>
-              <a:tailEnd type="triangle"/>
-            </a:ln>
-          </p:spPr>
-          <p:style>
-            <a:lnRef idx="1">
-              <a:schemeClr val="dk1"/>
-            </a:lnRef>
-            <a:fillRef idx="0">
-              <a:schemeClr val="dk1"/>
-            </a:fillRef>
-            <a:effectRef idx="0">
-              <a:schemeClr val="dk1"/>
-            </a:effectRef>
-            <a:fontRef idx="minor">
-              <a:schemeClr val="tx1"/>
-            </a:fontRef>
-          </p:style>
-        </p:cxnSp>
-        <p:cxnSp>
-          <p:nvCxnSpPr>
-            <p:cNvPr id="18" name="직선 화살표 연결선 17">
-              <a:extLst>
-                <a:ext uri="{FF2B5EF4-FFF2-40B4-BE49-F238E27FC236}">
-                  <a16:creationId xmlns:a16="http://schemas.microsoft.com/office/drawing/2014/main" id="{28DFA1C4-5143-EF8E-CE11-CF903C048E9A}"/>
-                </a:ext>
-              </a:extLst>
-            </p:cNvPr>
-            <p:cNvCxnSpPr/>
-            <p:nvPr/>
-          </p:nvCxnSpPr>
-          <p:spPr>
-            <a:xfrm flipV="1">
-              <a:off x="3350795" y="3910263"/>
-              <a:ext cx="0" cy="1004637"/>
-            </a:xfrm>
-            <a:prstGeom prst="straightConnector1">
-              <a:avLst/>
-            </a:prstGeom>
-            <a:ln>
-              <a:tailEnd type="triangle"/>
-            </a:ln>
-          </p:spPr>
-          <p:style>
-            <a:lnRef idx="1">
-              <a:schemeClr val="dk1"/>
-            </a:lnRef>
-            <a:fillRef idx="0">
-              <a:schemeClr val="dk1"/>
-            </a:fillRef>
-            <a:effectRef idx="0">
-              <a:schemeClr val="dk1"/>
-            </a:effectRef>
-            <a:fontRef idx="minor">
-              <a:schemeClr val="tx1"/>
-            </a:fontRef>
-          </p:style>
-        </p:cxnSp>
-        <p:cxnSp>
-          <p:nvCxnSpPr>
-            <p:cNvPr id="20" name="직선 화살표 연결선 19">
-              <a:extLst>
-                <a:ext uri="{FF2B5EF4-FFF2-40B4-BE49-F238E27FC236}">
-                  <a16:creationId xmlns:a16="http://schemas.microsoft.com/office/drawing/2014/main" id="{836A373C-4BDB-E7B0-D82D-ABD1F3EF3641}"/>
-                </a:ext>
-              </a:extLst>
-            </p:cNvPr>
-            <p:cNvCxnSpPr/>
-            <p:nvPr/>
-          </p:nvCxnSpPr>
-          <p:spPr>
-            <a:xfrm>
-              <a:off x="4301288" y="5131468"/>
-              <a:ext cx="1691441" cy="0"/>
-            </a:xfrm>
-            <a:prstGeom prst="straightConnector1">
-              <a:avLst/>
-            </a:prstGeom>
-            <a:ln>
-              <a:tailEnd type="triangle"/>
-            </a:ln>
-          </p:spPr>
-          <p:style>
-            <a:lnRef idx="1">
-              <a:schemeClr val="dk1"/>
-            </a:lnRef>
-            <a:fillRef idx="0">
-              <a:schemeClr val="dk1"/>
-            </a:fillRef>
-            <a:effectRef idx="0">
-              <a:schemeClr val="dk1"/>
-            </a:effectRef>
-            <a:fontRef idx="minor">
-              <a:schemeClr val="tx1"/>
-            </a:fontRef>
-          </p:style>
-        </p:cxnSp>
-        <p:cxnSp>
-          <p:nvCxnSpPr>
-            <p:cNvPr id="22" name="직선 화살표 연결선 21">
-              <a:extLst>
-                <a:ext uri="{FF2B5EF4-FFF2-40B4-BE49-F238E27FC236}">
-                  <a16:creationId xmlns:a16="http://schemas.microsoft.com/office/drawing/2014/main" id="{B87A7B50-3B4E-1910-A714-DEEB6619D3AA}"/>
-                </a:ext>
-              </a:extLst>
-            </p:cNvPr>
-            <p:cNvCxnSpPr/>
-            <p:nvPr/>
-          </p:nvCxnSpPr>
-          <p:spPr>
-            <a:xfrm flipH="1" flipV="1">
-              <a:off x="3964405" y="3910263"/>
-              <a:ext cx="2028324" cy="1630279"/>
-            </a:xfrm>
-            <a:prstGeom prst="straightConnector1">
-              <a:avLst/>
-            </a:prstGeom>
-            <a:ln>
-              <a:tailEnd type="triangle"/>
-            </a:ln>
-          </p:spPr>
-          <p:style>
-            <a:lnRef idx="1">
-              <a:schemeClr val="dk1"/>
-            </a:lnRef>
-            <a:fillRef idx="0">
-              <a:schemeClr val="dk1"/>
-            </a:fillRef>
-            <a:effectRef idx="0">
-              <a:schemeClr val="dk1"/>
-            </a:effectRef>
-            <a:fontRef idx="minor">
-              <a:schemeClr val="tx1"/>
-            </a:fontRef>
-          </p:style>
-        </p:cxnSp>
       </p:grpSp>
       <p:sp>
         <p:nvSpPr>
-          <p:cNvPr id="24" name="TextBox 23">
+          <p:cNvPr id="32" name="화살표: 오른쪽 31">
             <a:extLst>
               <a:ext uri="{FF2B5EF4-FFF2-40B4-BE49-F238E27FC236}">
-                <a16:creationId xmlns:a16="http://schemas.microsoft.com/office/drawing/2014/main" id="{C7A98B6E-BA0E-D6EA-DA24-BEF88CA34ABD}"/>
-              </a:ext>
-            </a:extLst>
-          </p:cNvPr>
-          <p:cNvSpPr txBox="1"/>
-          <p:nvPr/>
-        </p:nvSpPr>
-        <p:spPr>
-          <a:xfrm>
-            <a:off x="4208545" y="4059316"/>
-            <a:ext cx="2366713" cy="276999"/>
-          </a:xfrm>
-          <a:prstGeom prst="rect">
-            <a:avLst/>
-          </a:prstGeom>
-          <a:noFill/>
-        </p:spPr>
-        <p:txBody>
-          <a:bodyPr wrap="square" rtlCol="0">
-            <a:spAutoFit/>
-          </a:bodyPr>
-          <a:lstStyle/>
-          <a:p>
-            <a:r>
-              <a:rPr lang="ko-KR" altLang="en-US" sz="1200" dirty="0"/>
-              <a:t>거리가 </a:t>
-            </a:r>
-            <a:r>
-              <a:rPr lang="en-US" altLang="ko-KR" sz="1200" dirty="0"/>
-              <a:t>10</a:t>
-            </a:r>
-            <a:r>
-              <a:rPr lang="ko-KR" altLang="en-US" sz="1200" dirty="0"/>
-              <a:t>이내일때</a:t>
-            </a:r>
-          </a:p>
-        </p:txBody>
-      </p:sp>
-      <p:sp>
-        <p:nvSpPr>
-          <p:cNvPr id="25" name="TextBox 24">
-            <a:extLst>
-              <a:ext uri="{FF2B5EF4-FFF2-40B4-BE49-F238E27FC236}">
-                <a16:creationId xmlns:a16="http://schemas.microsoft.com/office/drawing/2014/main" id="{DA710294-3D2E-52A0-344C-7713B8E5C791}"/>
-              </a:ext>
-            </a:extLst>
-          </p:cNvPr>
-          <p:cNvSpPr txBox="1"/>
-          <p:nvPr/>
-        </p:nvSpPr>
-        <p:spPr>
-          <a:xfrm>
-            <a:off x="3523746" y="5128924"/>
-            <a:ext cx="2366713" cy="276999"/>
-          </a:xfrm>
-          <a:prstGeom prst="rect">
-            <a:avLst/>
-          </a:prstGeom>
-          <a:noFill/>
-        </p:spPr>
-        <p:txBody>
-          <a:bodyPr wrap="square" rtlCol="0">
-            <a:spAutoFit/>
-          </a:bodyPr>
-          <a:lstStyle/>
-          <a:p>
-            <a:r>
-              <a:rPr lang="ko-KR" altLang="en-US" sz="1200" dirty="0"/>
-              <a:t>거리가 </a:t>
-            </a:r>
-            <a:r>
-              <a:rPr lang="en-US" altLang="ko-KR" sz="1200" dirty="0"/>
-              <a:t>1</a:t>
-            </a:r>
-            <a:r>
-              <a:rPr lang="ko-KR" altLang="en-US" sz="1200" dirty="0"/>
-              <a:t>이내일때</a:t>
-            </a:r>
-          </a:p>
-        </p:txBody>
-      </p:sp>
-      <p:sp>
-        <p:nvSpPr>
-          <p:cNvPr id="26" name="TextBox 25">
-            <a:extLst>
-              <a:ext uri="{FF2B5EF4-FFF2-40B4-BE49-F238E27FC236}">
-                <a16:creationId xmlns:a16="http://schemas.microsoft.com/office/drawing/2014/main" id="{DFF2752B-008E-C24E-88E1-2AF5A126CA6D}"/>
-              </a:ext>
-            </a:extLst>
-          </p:cNvPr>
-          <p:cNvSpPr txBox="1"/>
-          <p:nvPr/>
-        </p:nvSpPr>
-        <p:spPr>
-          <a:xfrm>
-            <a:off x="3649076" y="2910438"/>
-            <a:ext cx="2366713" cy="276999"/>
-          </a:xfrm>
-          <a:prstGeom prst="rect">
-            <a:avLst/>
-          </a:prstGeom>
-          <a:noFill/>
-        </p:spPr>
-        <p:txBody>
-          <a:bodyPr wrap="square" rtlCol="0">
-            <a:spAutoFit/>
-          </a:bodyPr>
-          <a:lstStyle/>
-          <a:p>
-            <a:r>
-              <a:rPr lang="ko-KR" altLang="en-US" sz="1200" dirty="0"/>
-              <a:t>자동으로 상태전환</a:t>
-            </a:r>
-          </a:p>
-        </p:txBody>
-      </p:sp>
-      <p:sp>
-        <p:nvSpPr>
-          <p:cNvPr id="27" name="TextBox 26">
-            <a:extLst>
-              <a:ext uri="{FF2B5EF4-FFF2-40B4-BE49-F238E27FC236}">
-                <a16:creationId xmlns:a16="http://schemas.microsoft.com/office/drawing/2014/main" id="{0CEDEDC5-B885-2C7A-615C-C54A61FFE290}"/>
-              </a:ext>
-            </a:extLst>
-          </p:cNvPr>
-          <p:cNvSpPr txBox="1"/>
-          <p:nvPr/>
-        </p:nvSpPr>
-        <p:spPr>
-          <a:xfrm>
-            <a:off x="3649076" y="3211227"/>
-            <a:ext cx="2366713" cy="276999"/>
-          </a:xfrm>
-          <a:prstGeom prst="rect">
-            <a:avLst/>
-          </a:prstGeom>
-          <a:noFill/>
-        </p:spPr>
-        <p:txBody>
-          <a:bodyPr wrap="square" rtlCol="0">
-            <a:spAutoFit/>
-          </a:bodyPr>
-          <a:lstStyle/>
-          <a:p>
-            <a:r>
-              <a:rPr lang="ko-KR" altLang="en-US" sz="1200" dirty="0"/>
-              <a:t>자동으로 상태전환</a:t>
-            </a:r>
-          </a:p>
-        </p:txBody>
-      </p:sp>
-      <p:sp>
-        <p:nvSpPr>
-          <p:cNvPr id="28" name="TextBox 27">
-            <a:extLst>
-              <a:ext uri="{FF2B5EF4-FFF2-40B4-BE49-F238E27FC236}">
-                <a16:creationId xmlns:a16="http://schemas.microsoft.com/office/drawing/2014/main" id="{FA5C0F27-81F2-8E7D-A3E5-65317F340533}"/>
-              </a:ext>
-            </a:extLst>
-          </p:cNvPr>
-          <p:cNvSpPr txBox="1"/>
-          <p:nvPr/>
-        </p:nvSpPr>
-        <p:spPr>
-          <a:xfrm>
-            <a:off x="1282363" y="4118409"/>
-            <a:ext cx="2366713" cy="276999"/>
-          </a:xfrm>
-          <a:prstGeom prst="rect">
-            <a:avLst/>
-          </a:prstGeom>
-          <a:noFill/>
-        </p:spPr>
-        <p:txBody>
-          <a:bodyPr wrap="square" rtlCol="0">
-            <a:spAutoFit/>
-          </a:bodyPr>
-          <a:lstStyle/>
-          <a:p>
-            <a:r>
-              <a:rPr lang="ko-KR" altLang="en-US" sz="1200" dirty="0"/>
-              <a:t>자동으로 상태전환</a:t>
-            </a:r>
-          </a:p>
-        </p:txBody>
-      </p:sp>
-      <p:sp>
-        <p:nvSpPr>
-          <p:cNvPr id="29" name="TextBox 28">
-            <a:extLst>
-              <a:ext uri="{FF2B5EF4-FFF2-40B4-BE49-F238E27FC236}">
-                <a16:creationId xmlns:a16="http://schemas.microsoft.com/office/drawing/2014/main" id="{5E3F51A4-AAE6-459F-E9BF-F48EB05FE47E}"/>
-              </a:ext>
-            </a:extLst>
-          </p:cNvPr>
-          <p:cNvSpPr txBox="1"/>
-          <p:nvPr/>
-        </p:nvSpPr>
-        <p:spPr>
-          <a:xfrm>
-            <a:off x="4496551" y="4563577"/>
-            <a:ext cx="2366713" cy="276999"/>
-          </a:xfrm>
-          <a:prstGeom prst="rect">
-            <a:avLst/>
-          </a:prstGeom>
-          <a:noFill/>
-        </p:spPr>
-        <p:txBody>
-          <a:bodyPr wrap="square" rtlCol="0">
-            <a:spAutoFit/>
-          </a:bodyPr>
-          <a:lstStyle/>
-          <a:p>
-            <a:r>
-              <a:rPr lang="ko-KR" altLang="en-US" sz="1200" dirty="0"/>
-              <a:t>자동으로 상태전환</a:t>
-            </a:r>
-          </a:p>
-        </p:txBody>
-      </p:sp>
-      <p:sp>
-        <p:nvSpPr>
-          <p:cNvPr id="30" name="직사각형 29">
-            <a:extLst>
-              <a:ext uri="{FF2B5EF4-FFF2-40B4-BE49-F238E27FC236}">
-                <a16:creationId xmlns:a16="http://schemas.microsoft.com/office/drawing/2014/main" id="{964BD41D-298D-49E8-7A78-8FDB9A71D792}"/>
+                <a16:creationId xmlns:a16="http://schemas.microsoft.com/office/drawing/2014/main" id="{76F6A7E9-2A52-7EDE-F9F6-2C6F3062907A}"/>
               </a:ext>
             </a:extLst>
           </p:cNvPr>
@@ -13755,24 +12210,30 @@
         </p:nvSpPr>
         <p:spPr>
           <a:xfrm>
-            <a:off x="7513721" y="3937935"/>
-            <a:ext cx="1832811" cy="826570"/>
+            <a:off x="3378926" y="2653296"/>
+            <a:ext cx="1045028" cy="357052"/>
           </a:xfrm>
-          <a:prstGeom prst="rect">
+          <a:prstGeom prst="rightArrow">
             <a:avLst/>
           </a:prstGeom>
+          <a:solidFill>
+            <a:schemeClr val="accent4">
+              <a:alpha val="50000"/>
+            </a:schemeClr>
+          </a:solidFill>
+          <a:ln>
+            <a:noFill/>
+          </a:ln>
         </p:spPr>
         <p:style>
-          <a:lnRef idx="2">
-            <a:schemeClr val="accent1">
-              <a:shade val="15000"/>
-            </a:schemeClr>
+          <a:lnRef idx="0">
+            <a:scrgbClr r="0" g="0" b="0"/>
           </a:lnRef>
-          <a:fillRef idx="1">
-            <a:schemeClr val="accent1"/>
+          <a:fillRef idx="0">
+            <a:scrgbClr r="0" g="0" b="0"/>
           </a:fillRef>
           <a:effectRef idx="0">
-            <a:schemeClr val="accent1"/>
+            <a:scrgbClr r="0" g="0" b="0"/>
           </a:effectRef>
           <a:fontRef idx="minor">
             <a:schemeClr val="lt1"/>
@@ -13783,33 +12244,638 @@
           <a:lstStyle/>
           <a:p>
             <a:pPr algn="ctr"/>
-            <a:r>
-              <a:rPr lang="en-US" altLang="ko-KR" dirty="0"/>
-              <a:t>DEATH</a:t>
-            </a:r>
-          </a:p>
-          <a:p>
-            <a:pPr algn="ctr"/>
-            <a:r>
-              <a:rPr lang="en-US" altLang="ko-KR" dirty="0"/>
-              <a:t>(hp &lt;= 0</a:t>
-            </a:r>
-            <a:r>
-              <a:rPr lang="ko-KR" altLang="en-US" dirty="0" err="1"/>
-              <a:t>일때</a:t>
-            </a:r>
-            <a:r>
-              <a:rPr lang="en-US" altLang="ko-KR" dirty="0"/>
-              <a:t>)</a:t>
-            </a:r>
-            <a:endParaRPr lang="ko-KR" altLang="en-US" dirty="0"/>
+            <a:endParaRPr lang="ko-KR" altLang="en-US"/>
           </a:p>
         </p:txBody>
       </p:sp>
+      <p:sp>
+        <p:nvSpPr>
+          <p:cNvPr id="33" name="화살표: 오른쪽 32">
+            <a:extLst>
+              <a:ext uri="{FF2B5EF4-FFF2-40B4-BE49-F238E27FC236}">
+                <a16:creationId xmlns:a16="http://schemas.microsoft.com/office/drawing/2014/main" id="{F047CEC6-2513-C021-EE99-ED0CBFCCF477}"/>
+              </a:ext>
+            </a:extLst>
+          </p:cNvPr>
+          <p:cNvSpPr/>
+          <p:nvPr/>
+        </p:nvSpPr>
+        <p:spPr>
+          <a:xfrm rot="5400000">
+            <a:off x="5227771" y="3697896"/>
+            <a:ext cx="732451" cy="357052"/>
+          </a:xfrm>
+          <a:prstGeom prst="rightArrow">
+            <a:avLst/>
+          </a:prstGeom>
+          <a:solidFill>
+            <a:schemeClr val="accent4">
+              <a:alpha val="50000"/>
+            </a:schemeClr>
+          </a:solidFill>
+          <a:ln>
+            <a:noFill/>
+          </a:ln>
+        </p:spPr>
+        <p:style>
+          <a:lnRef idx="0">
+            <a:scrgbClr r="0" g="0" b="0"/>
+          </a:lnRef>
+          <a:fillRef idx="0">
+            <a:scrgbClr r="0" g="0" b="0"/>
+          </a:fillRef>
+          <a:effectRef idx="0">
+            <a:scrgbClr r="0" g="0" b="0"/>
+          </a:effectRef>
+          <a:fontRef idx="minor">
+            <a:schemeClr val="lt1"/>
+          </a:fontRef>
+        </p:style>
+        <p:txBody>
+          <a:bodyPr rtlCol="0" anchor="ctr"/>
+          <a:lstStyle/>
+          <a:p>
+            <a:pPr algn="ctr"/>
+            <a:endParaRPr lang="ko-KR" altLang="en-US"/>
+          </a:p>
+        </p:txBody>
+      </p:sp>
+      <p:sp>
+        <p:nvSpPr>
+          <p:cNvPr id="34" name="화살표: 오른쪽 33">
+            <a:extLst>
+              <a:ext uri="{FF2B5EF4-FFF2-40B4-BE49-F238E27FC236}">
+                <a16:creationId xmlns:a16="http://schemas.microsoft.com/office/drawing/2014/main" id="{CDCA4EC1-462F-36F3-D0A8-2ED4C1B8E7B2}"/>
+              </a:ext>
+            </a:extLst>
+          </p:cNvPr>
+          <p:cNvSpPr/>
+          <p:nvPr/>
+        </p:nvSpPr>
+        <p:spPr>
+          <a:xfrm rot="10800000">
+            <a:off x="3378926" y="4655179"/>
+            <a:ext cx="1045028" cy="357052"/>
+          </a:xfrm>
+          <a:prstGeom prst="rightArrow">
+            <a:avLst/>
+          </a:prstGeom>
+          <a:solidFill>
+            <a:schemeClr val="accent4">
+              <a:alpha val="50000"/>
+            </a:schemeClr>
+          </a:solidFill>
+          <a:ln>
+            <a:noFill/>
+          </a:ln>
+        </p:spPr>
+        <p:style>
+          <a:lnRef idx="0">
+            <a:scrgbClr r="0" g="0" b="0"/>
+          </a:lnRef>
+          <a:fillRef idx="0">
+            <a:scrgbClr r="0" g="0" b="0"/>
+          </a:fillRef>
+          <a:effectRef idx="0">
+            <a:scrgbClr r="0" g="0" b="0"/>
+          </a:effectRef>
+          <a:fontRef idx="minor">
+            <a:schemeClr val="lt1"/>
+          </a:fontRef>
+        </p:style>
+        <p:txBody>
+          <a:bodyPr rtlCol="0" anchor="ctr"/>
+          <a:lstStyle/>
+          <a:p>
+            <a:pPr algn="ctr"/>
+            <a:endParaRPr lang="ko-KR" altLang="en-US"/>
+          </a:p>
+        </p:txBody>
+      </p:sp>
+      <p:sp>
+        <p:nvSpPr>
+          <p:cNvPr id="35" name="화살표: 오른쪽 34">
+            <a:extLst>
+              <a:ext uri="{FF2B5EF4-FFF2-40B4-BE49-F238E27FC236}">
+                <a16:creationId xmlns:a16="http://schemas.microsoft.com/office/drawing/2014/main" id="{B0A86D73-9E10-E24B-11EB-096FBFBC0B0C}"/>
+              </a:ext>
+            </a:extLst>
+          </p:cNvPr>
+          <p:cNvSpPr/>
+          <p:nvPr/>
+        </p:nvSpPr>
+        <p:spPr>
+          <a:xfrm rot="16200000">
+            <a:off x="1815815" y="3697897"/>
+            <a:ext cx="732451" cy="357052"/>
+          </a:xfrm>
+          <a:prstGeom prst="rightArrow">
+            <a:avLst/>
+          </a:prstGeom>
+          <a:solidFill>
+            <a:schemeClr val="accent4">
+              <a:alpha val="50000"/>
+            </a:schemeClr>
+          </a:solidFill>
+          <a:ln>
+            <a:noFill/>
+          </a:ln>
+        </p:spPr>
+        <p:style>
+          <a:lnRef idx="0">
+            <a:scrgbClr r="0" g="0" b="0"/>
+          </a:lnRef>
+          <a:fillRef idx="0">
+            <a:scrgbClr r="0" g="0" b="0"/>
+          </a:fillRef>
+          <a:effectRef idx="0">
+            <a:scrgbClr r="0" g="0" b="0"/>
+          </a:effectRef>
+          <a:fontRef idx="minor">
+            <a:schemeClr val="lt1"/>
+          </a:fontRef>
+        </p:style>
+        <p:txBody>
+          <a:bodyPr rtlCol="0" anchor="ctr"/>
+          <a:lstStyle/>
+          <a:p>
+            <a:pPr algn="ctr"/>
+            <a:endParaRPr lang="ko-KR" altLang="en-US"/>
+          </a:p>
+        </p:txBody>
+      </p:sp>
+      <p:sp>
+        <p:nvSpPr>
+          <p:cNvPr id="36" name="내용 개체 틀 2">
+            <a:extLst>
+              <a:ext uri="{FF2B5EF4-FFF2-40B4-BE49-F238E27FC236}">
+                <a16:creationId xmlns:a16="http://schemas.microsoft.com/office/drawing/2014/main" id="{FCCC3C36-97D8-3FE4-19F1-8A6C0EB8301F}"/>
+              </a:ext>
+            </a:extLst>
+          </p:cNvPr>
+          <p:cNvSpPr txBox="1">
+            <a:spLocks/>
+          </p:cNvSpPr>
+          <p:nvPr/>
+        </p:nvSpPr>
+        <p:spPr>
+          <a:xfrm>
+            <a:off x="6964220" y="531223"/>
+            <a:ext cx="4670948" cy="5808617"/>
+          </a:xfrm>
+          <a:prstGeom prst="rect">
+            <a:avLst/>
+          </a:prstGeom>
+        </p:spPr>
+        <p:txBody>
+          <a:bodyPr vert="horz" lIns="91440" tIns="45720" rIns="91440" bIns="45720" rtlCol="0">
+            <a:normAutofit/>
+          </a:bodyPr>
+          <a:lstStyle>
+            <a:lvl1pPr marL="182880" indent="-182880" algn="l" defTabSz="914400" rtl="0" eaLnBrk="1" latinLnBrk="1" hangingPunct="1">
+              <a:lnSpc>
+                <a:spcPct val="110000"/>
+              </a:lnSpc>
+              <a:spcBef>
+                <a:spcPts val="900"/>
+              </a:spcBef>
+              <a:spcAft>
+                <a:spcPts val="0"/>
+              </a:spcAft>
+              <a:buClr>
+                <a:schemeClr val="tx1">
+                  <a:lumMod val="85000"/>
+                  <a:lumOff val="15000"/>
+                </a:schemeClr>
+              </a:buClr>
+              <a:buFont typeface="Garamond" pitchFamily="18" charset="0"/>
+              <a:buChar char="◦"/>
+              <a:defRPr sz="1500" kern="1200">
+                <a:solidFill>
+                  <a:schemeClr val="tx1"/>
+                </a:solidFill>
+                <a:latin typeface="+mj-ea"/>
+                <a:ea typeface="+mj-ea"/>
+                <a:cs typeface="+mn-cs"/>
+              </a:defRPr>
+            </a:lvl1pPr>
+            <a:lvl2pPr marL="457200" indent="-182880" algn="l" defTabSz="914400" rtl="0" eaLnBrk="1" latinLnBrk="1" hangingPunct="1">
+              <a:lnSpc>
+                <a:spcPct val="100000"/>
+              </a:lnSpc>
+              <a:spcBef>
+                <a:spcPts val="500"/>
+              </a:spcBef>
+              <a:buClr>
+                <a:schemeClr val="tx1">
+                  <a:lumMod val="85000"/>
+                  <a:lumOff val="15000"/>
+                </a:schemeClr>
+              </a:buClr>
+              <a:buFont typeface="Garamond" pitchFamily="18" charset="0"/>
+              <a:buChar char="◦"/>
+              <a:defRPr sz="1300" kern="1200">
+                <a:solidFill>
+                  <a:schemeClr val="tx1"/>
+                </a:solidFill>
+                <a:latin typeface="+mj-ea"/>
+                <a:ea typeface="+mj-ea"/>
+                <a:cs typeface="+mn-cs"/>
+              </a:defRPr>
+            </a:lvl2pPr>
+            <a:lvl3pPr marL="731520" indent="-182880" algn="l" defTabSz="914400" rtl="0" eaLnBrk="1" latinLnBrk="1" hangingPunct="1">
+              <a:lnSpc>
+                <a:spcPct val="100000"/>
+              </a:lnSpc>
+              <a:spcBef>
+                <a:spcPts val="500"/>
+              </a:spcBef>
+              <a:buClr>
+                <a:schemeClr val="tx1">
+                  <a:lumMod val="85000"/>
+                  <a:lumOff val="15000"/>
+                </a:schemeClr>
+              </a:buClr>
+              <a:buFont typeface="Garamond" pitchFamily="18" charset="0"/>
+              <a:buChar char="◦"/>
+              <a:defRPr sz="1200" kern="1200">
+                <a:solidFill>
+                  <a:schemeClr val="tx1"/>
+                </a:solidFill>
+                <a:latin typeface="+mj-ea"/>
+                <a:ea typeface="+mj-ea"/>
+                <a:cs typeface="+mn-cs"/>
+              </a:defRPr>
+            </a:lvl3pPr>
+            <a:lvl4pPr marL="1005840" indent="-182880" algn="l" defTabSz="914400" rtl="0" eaLnBrk="1" latinLnBrk="1" hangingPunct="1">
+              <a:lnSpc>
+                <a:spcPct val="100000"/>
+              </a:lnSpc>
+              <a:spcBef>
+                <a:spcPts val="500"/>
+              </a:spcBef>
+              <a:buClr>
+                <a:schemeClr val="tx1">
+                  <a:lumMod val="85000"/>
+                  <a:lumOff val="15000"/>
+                </a:schemeClr>
+              </a:buClr>
+              <a:buFont typeface="Garamond" pitchFamily="18" charset="0"/>
+              <a:buChar char="◦"/>
+              <a:defRPr sz="1200" kern="1200">
+                <a:solidFill>
+                  <a:schemeClr val="tx1"/>
+                </a:solidFill>
+                <a:latin typeface="+mj-ea"/>
+                <a:ea typeface="+mj-ea"/>
+                <a:cs typeface="+mn-cs"/>
+              </a:defRPr>
+            </a:lvl4pPr>
+            <a:lvl5pPr marL="1280160" indent="-182880" algn="l" defTabSz="914400" rtl="0" eaLnBrk="1" latinLnBrk="1" hangingPunct="1">
+              <a:lnSpc>
+                <a:spcPct val="100000"/>
+              </a:lnSpc>
+              <a:spcBef>
+                <a:spcPts val="500"/>
+              </a:spcBef>
+              <a:buClr>
+                <a:schemeClr val="tx1">
+                  <a:lumMod val="85000"/>
+                  <a:lumOff val="15000"/>
+                </a:schemeClr>
+              </a:buClr>
+              <a:buFont typeface="Garamond" pitchFamily="18" charset="0"/>
+              <a:buChar char="◦"/>
+              <a:defRPr sz="1200" kern="1200">
+                <a:solidFill>
+                  <a:schemeClr val="tx1"/>
+                </a:solidFill>
+                <a:latin typeface="+mj-ea"/>
+                <a:ea typeface="+mj-ea"/>
+                <a:cs typeface="+mn-cs"/>
+              </a:defRPr>
+            </a:lvl5pPr>
+            <a:lvl6pPr marL="1600000" indent="-228600" algn="l" defTabSz="914400" rtl="0" eaLnBrk="1" latinLnBrk="1" hangingPunct="1">
+              <a:lnSpc>
+                <a:spcPct val="100000"/>
+              </a:lnSpc>
+              <a:spcBef>
+                <a:spcPts val="500"/>
+              </a:spcBef>
+              <a:buClr>
+                <a:schemeClr val="tx1">
+                  <a:lumMod val="85000"/>
+                  <a:lumOff val="15000"/>
+                </a:schemeClr>
+              </a:buClr>
+              <a:buFont typeface="Garamond" pitchFamily="18" charset="0"/>
+              <a:buChar char="◦"/>
+              <a:defRPr sz="1400" kern="1200">
+                <a:solidFill>
+                  <a:schemeClr val="tx1"/>
+                </a:solidFill>
+                <a:latin typeface="+mn-lt"/>
+                <a:ea typeface="+mn-ea"/>
+                <a:cs typeface="+mn-cs"/>
+              </a:defRPr>
+            </a:lvl6pPr>
+            <a:lvl7pPr marL="1900000" indent="-228600" algn="l" defTabSz="914400" rtl="0" eaLnBrk="1" latinLnBrk="1" hangingPunct="1">
+              <a:lnSpc>
+                <a:spcPct val="100000"/>
+              </a:lnSpc>
+              <a:spcBef>
+                <a:spcPts val="500"/>
+              </a:spcBef>
+              <a:buClr>
+                <a:schemeClr val="tx1">
+                  <a:lumMod val="85000"/>
+                  <a:lumOff val="15000"/>
+                </a:schemeClr>
+              </a:buClr>
+              <a:buFont typeface="Garamond" pitchFamily="18" charset="0"/>
+              <a:buChar char="◦"/>
+              <a:defRPr sz="1400" kern="1200">
+                <a:solidFill>
+                  <a:schemeClr val="tx1"/>
+                </a:solidFill>
+                <a:latin typeface="+mn-lt"/>
+                <a:ea typeface="+mn-ea"/>
+                <a:cs typeface="+mn-cs"/>
+              </a:defRPr>
+            </a:lvl7pPr>
+            <a:lvl8pPr marL="2200000" indent="-228600" algn="l" defTabSz="914400" rtl="0" eaLnBrk="1" latinLnBrk="1" hangingPunct="1">
+              <a:lnSpc>
+                <a:spcPct val="100000"/>
+              </a:lnSpc>
+              <a:spcBef>
+                <a:spcPts val="500"/>
+              </a:spcBef>
+              <a:buClr>
+                <a:schemeClr val="tx1">
+                  <a:lumMod val="85000"/>
+                  <a:lumOff val="15000"/>
+                </a:schemeClr>
+              </a:buClr>
+              <a:buFont typeface="Garamond" pitchFamily="18" charset="0"/>
+              <a:buChar char="◦"/>
+              <a:defRPr sz="1400" kern="1200">
+                <a:solidFill>
+                  <a:schemeClr val="tx1"/>
+                </a:solidFill>
+                <a:latin typeface="+mn-lt"/>
+                <a:ea typeface="+mn-ea"/>
+                <a:cs typeface="+mn-cs"/>
+              </a:defRPr>
+            </a:lvl8pPr>
+            <a:lvl9pPr marL="2500000" indent="-228600" algn="l" defTabSz="914400" rtl="0" eaLnBrk="1" latinLnBrk="1" hangingPunct="1">
+              <a:lnSpc>
+                <a:spcPct val="100000"/>
+              </a:lnSpc>
+              <a:spcBef>
+                <a:spcPts val="500"/>
+              </a:spcBef>
+              <a:buClr>
+                <a:schemeClr val="tx1">
+                  <a:lumMod val="85000"/>
+                  <a:lumOff val="15000"/>
+                </a:schemeClr>
+              </a:buClr>
+              <a:buFont typeface="Garamond" pitchFamily="18" charset="0"/>
+              <a:buChar char="◦"/>
+              <a:defRPr sz="1400" kern="1200">
+                <a:solidFill>
+                  <a:schemeClr val="tx1"/>
+                </a:solidFill>
+                <a:latin typeface="+mn-lt"/>
+                <a:ea typeface="+mn-ea"/>
+                <a:cs typeface="+mn-cs"/>
+              </a:defRPr>
+            </a:lvl9pPr>
+          </a:lstStyle>
+          <a:p>
+            <a:r>
+              <a:rPr lang="en-US" altLang="ko-KR" dirty="0"/>
+              <a:t>Waiting: </a:t>
+            </a:r>
+            <a:r>
+              <a:rPr lang="ko-KR" altLang="en-US" dirty="0"/>
+              <a:t>플레이어를 받을 수 있는 상태</a:t>
+            </a:r>
+            <a:endParaRPr lang="en-US" altLang="ko-KR" dirty="0"/>
+          </a:p>
+          <a:p>
+            <a:r>
+              <a:rPr lang="en-US" altLang="ko-KR" dirty="0" err="1"/>
+              <a:t>PreStart</a:t>
+            </a:r>
+            <a:r>
+              <a:rPr lang="en-US" altLang="ko-KR" dirty="0"/>
+              <a:t>: 2</a:t>
+            </a:r>
+            <a:r>
+              <a:rPr lang="ko-KR" altLang="en-US" dirty="0"/>
+              <a:t>명의 플레이어를 받고 게임 시작 준비</a:t>
+            </a:r>
+            <a:endParaRPr lang="en-US" altLang="ko-KR" dirty="0"/>
+          </a:p>
+          <a:p>
+            <a:r>
+              <a:rPr lang="en-US" altLang="ko-KR" dirty="0"/>
+              <a:t>Start: </a:t>
+            </a:r>
+            <a:r>
+              <a:rPr lang="ko-KR" altLang="en-US" dirty="0"/>
+              <a:t>실제 게임 플레이를 진행하는 상태</a:t>
+            </a:r>
+            <a:endParaRPr lang="en-US" altLang="ko-KR" dirty="0"/>
+          </a:p>
+          <a:p>
+            <a:r>
+              <a:rPr lang="en-US" altLang="ko-KR" dirty="0"/>
+              <a:t>End: </a:t>
+            </a:r>
+            <a:r>
+              <a:rPr lang="ko-KR" altLang="en-US" dirty="0"/>
+              <a:t>게임이 완료되고 승패 결정이 난 상태 </a:t>
+            </a:r>
+            <a:endParaRPr lang="en-US" altLang="ko-KR" dirty="0"/>
+          </a:p>
+        </p:txBody>
+      </p:sp>
+      <p:pic>
+        <p:nvPicPr>
+          <p:cNvPr id="38" name="그림 37">
+            <a:extLst>
+              <a:ext uri="{FF2B5EF4-FFF2-40B4-BE49-F238E27FC236}">
+                <a16:creationId xmlns:a16="http://schemas.microsoft.com/office/drawing/2014/main" id="{0481649E-21B9-A559-3F97-60922D9E9C6A}"/>
+              </a:ext>
+            </a:extLst>
+          </p:cNvPr>
+          <p:cNvPicPr>
+            <a:picLocks noChangeAspect="1"/>
+          </p:cNvPicPr>
+          <p:nvPr/>
+        </p:nvPicPr>
+        <p:blipFill>
+          <a:blip r:embed="rId2"/>
+          <a:stretch>
+            <a:fillRect/>
+          </a:stretch>
+        </p:blipFill>
+        <p:spPr>
+          <a:xfrm>
+            <a:off x="7032729" y="2273214"/>
+            <a:ext cx="4533930" cy="3754923"/>
+          </a:xfrm>
+          <a:prstGeom prst="rect">
+            <a:avLst/>
+          </a:prstGeom>
+        </p:spPr>
+      </p:pic>
     </p:spTree>
     <p:extLst>
       <p:ext uri="{BB962C8B-B14F-4D97-AF65-F5344CB8AC3E}">
-        <p14:creationId xmlns:p14="http://schemas.microsoft.com/office/powerpoint/2010/main" val="2594855001"/>
+        <p14:creationId xmlns:p14="http://schemas.microsoft.com/office/powerpoint/2010/main" val="595865189"/>
+      </p:ext>
+    </p:extLst>
+  </p:cSld>
+  <p:clrMapOvr>
+    <a:masterClrMapping/>
+  </p:clrMapOvr>
+</p:sld>
+</file>
+
+<file path=ppt/slides/slide9.xml><?xml version="1.0" encoding="utf-8"?>
+<p:sld xmlns:a="http://schemas.openxmlformats.org/drawingml/2006/main" xmlns:r="http://schemas.openxmlformats.org/officeDocument/2006/relationships" xmlns:p="http://schemas.openxmlformats.org/presentationml/2006/main">
+  <p:cSld>
+    <p:spTree>
+      <p:nvGrpSpPr>
+        <p:cNvPr id="1" name=""/>
+        <p:cNvGrpSpPr/>
+        <p:nvPr/>
+      </p:nvGrpSpPr>
+      <p:grpSpPr>
+        <a:xfrm>
+          <a:off x="0" y="0"/>
+          <a:ext cx="0" cy="0"/>
+          <a:chOff x="0" y="0"/>
+          <a:chExt cx="0" cy="0"/>
+        </a:xfrm>
+      </p:grpSpPr>
+      <p:sp>
+        <p:nvSpPr>
+          <p:cNvPr id="2" name="제목 1">
+            <a:extLst>
+              <a:ext uri="{FF2B5EF4-FFF2-40B4-BE49-F238E27FC236}">
+                <a16:creationId xmlns:a16="http://schemas.microsoft.com/office/drawing/2014/main" id="{957E35E5-E488-A22F-CAEB-C029D65E0F05}"/>
+              </a:ext>
+            </a:extLst>
+          </p:cNvPr>
+          <p:cNvSpPr>
+            <a:spLocks noGrp="1"/>
+          </p:cNvSpPr>
+          <p:nvPr>
+            <p:ph type="title"/>
+          </p:nvPr>
+        </p:nvSpPr>
+        <p:spPr/>
+        <p:txBody>
+          <a:bodyPr/>
+          <a:lstStyle/>
+          <a:p>
+            <a:r>
+              <a:rPr lang="ko-KR" altLang="en-US" dirty="0"/>
+              <a:t>단위 테스트</a:t>
+            </a:r>
+          </a:p>
+        </p:txBody>
+      </p:sp>
+      <p:sp>
+        <p:nvSpPr>
+          <p:cNvPr id="8" name="내용 개체 틀 7">
+            <a:extLst>
+              <a:ext uri="{FF2B5EF4-FFF2-40B4-BE49-F238E27FC236}">
+                <a16:creationId xmlns:a16="http://schemas.microsoft.com/office/drawing/2014/main" id="{0311FD21-9E96-0553-FB5B-59C6E41017AF}"/>
+              </a:ext>
+            </a:extLst>
+          </p:cNvPr>
+          <p:cNvSpPr>
+            <a:spLocks noGrp="1"/>
+          </p:cNvSpPr>
+          <p:nvPr>
+            <p:ph idx="1"/>
+          </p:nvPr>
+        </p:nvSpPr>
+        <p:spPr/>
+        <p:txBody>
+          <a:bodyPr/>
+          <a:lstStyle/>
+          <a:p>
+            <a:r>
+              <a:rPr lang="ko-KR" altLang="en-US" dirty="0"/>
+              <a:t>일부 로직의 경우 </a:t>
+            </a:r>
+            <a:r>
+              <a:rPr lang="en-US" altLang="ko-KR" dirty="0" err="1"/>
+              <a:t>Nunit</a:t>
+            </a:r>
+            <a:r>
+              <a:rPr lang="ko-KR" altLang="en-US" dirty="0"/>
+              <a:t>을 이용한 </a:t>
+            </a:r>
+            <a:r>
+              <a:rPr lang="en-US" altLang="ko-KR" dirty="0"/>
+              <a:t>Unit</a:t>
+            </a:r>
+            <a:r>
+              <a:rPr lang="ko-KR" altLang="en-US" dirty="0"/>
+              <a:t> </a:t>
+            </a:r>
+            <a:r>
+              <a:rPr lang="en-US" altLang="ko-KR" dirty="0"/>
+              <a:t>Test</a:t>
+            </a:r>
+            <a:r>
+              <a:rPr lang="ko-KR" altLang="en-US" dirty="0"/>
+              <a:t>를 수행하여 검증</a:t>
+            </a:r>
+          </a:p>
+        </p:txBody>
+      </p:sp>
+      <p:pic>
+        <p:nvPicPr>
+          <p:cNvPr id="9" name="내용 개체 틀 5">
+            <a:extLst>
+              <a:ext uri="{FF2B5EF4-FFF2-40B4-BE49-F238E27FC236}">
+                <a16:creationId xmlns:a16="http://schemas.microsoft.com/office/drawing/2014/main" id="{F920F87F-C968-BAAE-17A5-990CA19441D3}"/>
+              </a:ext>
+            </a:extLst>
+          </p:cNvPr>
+          <p:cNvPicPr>
+            <a:picLocks noChangeAspect="1"/>
+          </p:cNvPicPr>
+          <p:nvPr/>
+        </p:nvPicPr>
+        <p:blipFill>
+          <a:blip r:embed="rId2"/>
+          <a:stretch>
+            <a:fillRect/>
+          </a:stretch>
+        </p:blipFill>
+        <p:spPr>
+          <a:xfrm>
+            <a:off x="1208087" y="2474241"/>
+            <a:ext cx="5874388" cy="3849687"/>
+          </a:xfrm>
+          <a:prstGeom prst="rect">
+            <a:avLst/>
+          </a:prstGeom>
+        </p:spPr>
+      </p:pic>
+    </p:spTree>
+    <p:extLst>
+      <p:ext uri="{BB962C8B-B14F-4D97-AF65-F5344CB8AC3E}">
+        <p14:creationId xmlns:p14="http://schemas.microsoft.com/office/powerpoint/2010/main" val="1125125135"/>
       </p:ext>
     </p:extLst>
   </p:cSld>

--- a/RTS 포트폴리오/이창하_RTS_포트폴리오.pptx
+++ b/RTS 포트폴리오/이창하_RTS_포트폴리오.pptx
@@ -5,10 +5,10 @@
     <p:sldMasterId id="2147483673" r:id="rId1"/>
   </p:sldMasterIdLst>
   <p:notesMasterIdLst>
-    <p:notesMasterId r:id="rId13"/>
+    <p:notesMasterId r:id="rId14"/>
   </p:notesMasterIdLst>
   <p:handoutMasterIdLst>
-    <p:handoutMasterId r:id="rId14"/>
+    <p:handoutMasterId r:id="rId15"/>
   </p:handoutMasterIdLst>
   <p:sldIdLst>
     <p:sldId id="257" r:id="rId2"/>
@@ -19,9 +19,10 @@
     <p:sldId id="289" r:id="rId7"/>
     <p:sldId id="283" r:id="rId8"/>
     <p:sldId id="284" r:id="rId9"/>
-    <p:sldId id="291" r:id="rId10"/>
-    <p:sldId id="287" r:id="rId11"/>
-    <p:sldId id="279" r:id="rId12"/>
+    <p:sldId id="286" r:id="rId10"/>
+    <p:sldId id="291" r:id="rId11"/>
+    <p:sldId id="287" r:id="rId12"/>
+    <p:sldId id="279" r:id="rId13"/>
   </p:sldIdLst>
   <p:sldSz cx="12192000" cy="6858000"/>
   <p:notesSz cx="6858000" cy="9144000"/>
@@ -9003,6 +9004,146 @@
           <p:cNvPr id="2" name="제목 1">
             <a:extLst>
               <a:ext uri="{FF2B5EF4-FFF2-40B4-BE49-F238E27FC236}">
+                <a16:creationId xmlns:a16="http://schemas.microsoft.com/office/drawing/2014/main" id="{957E35E5-E488-A22F-CAEB-C029D65E0F05}"/>
+              </a:ext>
+            </a:extLst>
+          </p:cNvPr>
+          <p:cNvSpPr>
+            <a:spLocks noGrp="1"/>
+          </p:cNvSpPr>
+          <p:nvPr>
+            <p:ph type="title"/>
+          </p:nvPr>
+        </p:nvSpPr>
+        <p:spPr/>
+        <p:txBody>
+          <a:bodyPr/>
+          <a:lstStyle/>
+          <a:p>
+            <a:r>
+              <a:rPr lang="ko-KR" altLang="en-US" dirty="0"/>
+              <a:t>단위 테스트</a:t>
+            </a:r>
+          </a:p>
+        </p:txBody>
+      </p:sp>
+      <p:sp>
+        <p:nvSpPr>
+          <p:cNvPr id="8" name="내용 개체 틀 7">
+            <a:extLst>
+              <a:ext uri="{FF2B5EF4-FFF2-40B4-BE49-F238E27FC236}">
+                <a16:creationId xmlns:a16="http://schemas.microsoft.com/office/drawing/2014/main" id="{0311FD21-9E96-0553-FB5B-59C6E41017AF}"/>
+              </a:ext>
+            </a:extLst>
+          </p:cNvPr>
+          <p:cNvSpPr>
+            <a:spLocks noGrp="1"/>
+          </p:cNvSpPr>
+          <p:nvPr>
+            <p:ph idx="1"/>
+          </p:nvPr>
+        </p:nvSpPr>
+        <p:spPr/>
+        <p:txBody>
+          <a:bodyPr/>
+          <a:lstStyle/>
+          <a:p>
+            <a:r>
+              <a:rPr lang="ko-KR" altLang="en-US" dirty="0"/>
+              <a:t>일부 로직의 경우 </a:t>
+            </a:r>
+            <a:r>
+              <a:rPr lang="en-US" altLang="ko-KR" dirty="0" err="1"/>
+              <a:t>Xunit</a:t>
+            </a:r>
+            <a:r>
+              <a:rPr lang="ko-KR" altLang="en-US" dirty="0"/>
+              <a:t>을 이용한 </a:t>
+            </a:r>
+            <a:r>
+              <a:rPr lang="en-US" altLang="ko-KR" dirty="0"/>
+              <a:t>Unit</a:t>
+            </a:r>
+            <a:r>
+              <a:rPr lang="ko-KR" altLang="en-US" dirty="0"/>
+              <a:t> </a:t>
+            </a:r>
+            <a:r>
+              <a:rPr lang="en-US" altLang="ko-KR" dirty="0"/>
+              <a:t>Test</a:t>
+            </a:r>
+            <a:r>
+              <a:rPr lang="ko-KR" altLang="en-US" dirty="0"/>
+              <a:t>를 수행하여 검증하였습니다</a:t>
+            </a:r>
+          </a:p>
+        </p:txBody>
+      </p:sp>
+      <p:pic>
+        <p:nvPicPr>
+          <p:cNvPr id="4" name="그림 3">
+            <a:extLst>
+              <a:ext uri="{FF2B5EF4-FFF2-40B4-BE49-F238E27FC236}">
+                <a16:creationId xmlns:a16="http://schemas.microsoft.com/office/drawing/2014/main" id="{8D7D2FE1-2A31-2094-46E6-44B5DC326EBD}"/>
+              </a:ext>
+            </a:extLst>
+          </p:cNvPr>
+          <p:cNvPicPr>
+            <a:picLocks noChangeAspect="1"/>
+          </p:cNvPicPr>
+          <p:nvPr/>
+        </p:nvPicPr>
+        <p:blipFill>
+          <a:blip r:embed="rId2"/>
+          <a:stretch>
+            <a:fillRect/>
+          </a:stretch>
+        </p:blipFill>
+        <p:spPr>
+          <a:xfrm>
+            <a:off x="1210534" y="2568741"/>
+            <a:ext cx="5309403" cy="3600841"/>
+          </a:xfrm>
+          <a:prstGeom prst="rect">
+            <a:avLst/>
+          </a:prstGeom>
+        </p:spPr>
+      </p:pic>
+    </p:spTree>
+    <p:extLst>
+      <p:ext uri="{BB962C8B-B14F-4D97-AF65-F5344CB8AC3E}">
+        <p14:creationId xmlns:p14="http://schemas.microsoft.com/office/powerpoint/2010/main" val="1125125135"/>
+      </p:ext>
+    </p:extLst>
+  </p:cSld>
+  <p:clrMapOvr>
+    <a:masterClrMapping/>
+  </p:clrMapOvr>
+</p:sld>
+</file>
+
+<file path=ppt/slides/slide11.xml><?xml version="1.0" encoding="utf-8"?>
+<p:sld xmlns:a="http://schemas.openxmlformats.org/drawingml/2006/main" xmlns:r="http://schemas.openxmlformats.org/officeDocument/2006/relationships" xmlns:p="http://schemas.openxmlformats.org/presentationml/2006/main">
+  <p:cSld>
+    <p:spTree>
+      <p:nvGrpSpPr>
+        <p:cNvPr id="1" name=""/>
+        <p:cNvGrpSpPr/>
+        <p:nvPr/>
+      </p:nvGrpSpPr>
+      <p:grpSpPr>
+        <a:xfrm>
+          <a:off x="0" y="0"/>
+          <a:ext cx="0" cy="0"/>
+          <a:chOff x="0" y="0"/>
+          <a:chExt cx="0" cy="0"/>
+        </a:xfrm>
+      </p:grpSpPr>
+      <p:sp>
+        <p:nvSpPr>
+          <p:cNvPr id="2" name="제목 1">
+            <a:extLst>
+              <a:ext uri="{FF2B5EF4-FFF2-40B4-BE49-F238E27FC236}">
                 <a16:creationId xmlns:a16="http://schemas.microsoft.com/office/drawing/2014/main" id="{2B9563F7-937A-0323-AB79-0024604124A3}"/>
               </a:ext>
             </a:extLst>
@@ -9208,7 +9349,7 @@
 </p:sld>
 </file>
 
-<file path=ppt/slides/slide11.xml><?xml version="1.0" encoding="utf-8"?>
+<file path=ppt/slides/slide12.xml><?xml version="1.0" encoding="utf-8"?>
 <p:sld xmlns:a="http://schemas.openxmlformats.org/drawingml/2006/main" xmlns:r="http://schemas.openxmlformats.org/officeDocument/2006/relationships" xmlns:p="http://schemas.openxmlformats.org/presentationml/2006/main">
   <p:cSld>
     <p:spTree>
@@ -10445,15 +10586,7 @@
             </a:r>
             <a:r>
               <a:rPr lang="ko-KR" altLang="en-US" sz="1600" dirty="0"/>
-              <a:t>클라이언트는 게임서버와 게임이 </a:t>
-            </a:r>
-            <a:r>
-              <a:rPr lang="ko-KR" altLang="en-US" sz="1600" dirty="0" err="1"/>
-              <a:t>종료될때까지</a:t>
-            </a:r>
-            <a:r>
-              <a:rPr lang="ko-KR" altLang="en-US" sz="1600" dirty="0"/>
-              <a:t> 커넥션을 맺은 후 게임플레이를 진행</a:t>
+              <a:t>클라이언트는 게임서버와 게임이 종료될 때 까지 커넥션을 맺은 후 게임플레이를 진행</a:t>
             </a:r>
           </a:p>
         </p:txBody>
@@ -11638,21 +11771,8 @@
           <a:p>
             <a:r>
               <a:rPr lang="ko-KR" altLang="en-US" dirty="0"/>
-              <a:t>패킷 처리 </a:t>
-            </a:r>
-            <a:r>
-              <a:rPr lang="en-US" altLang="ko-KR" dirty="0"/>
-              <a:t>(</a:t>
-            </a:r>
-            <a:r>
-              <a:rPr lang="ko-KR" altLang="en-US" dirty="0"/>
-              <a:t>여기 수정해라</a:t>
-            </a:r>
-            <a:r>
-              <a:rPr lang="en-US" altLang="ko-KR" dirty="0"/>
-              <a:t>~~~~)</a:t>
-            </a:r>
-            <a:endParaRPr lang="ko-KR" altLang="en-US" dirty="0"/>
+              <a:t>패킷 처리</a:t>
+            </a:r>
           </a:p>
         </p:txBody>
       </p:sp>
@@ -11694,14 +11814,6 @@
               <a:t>. </a:t>
             </a:r>
             <a:r>
-              <a:rPr lang="ko-KR" altLang="en-US" dirty="0" err="1"/>
-              <a:t>싱글쓰레드인</a:t>
-            </a:r>
-            <a:r>
-              <a:rPr lang="ko-KR" altLang="en-US" dirty="0"/>
-              <a:t> </a:t>
-            </a:r>
-            <a:r>
               <a:rPr lang="en-US" altLang="ko-KR" dirty="0" err="1"/>
               <a:t>JobQueue</a:t>
             </a:r>
@@ -11756,50 +11868,30 @@
               <a:rPr lang="en-US" altLang="ko-KR" dirty="0"/>
               <a:t>Multiple Producer Single Consumer </a:t>
             </a:r>
-          </a:p>
-          <a:p>
+            <a:r>
+              <a:rPr lang="ko-KR" altLang="en-US" dirty="0"/>
+              <a:t>기반의 </a:t>
+            </a:r>
+            <a:r>
+              <a:rPr lang="ko-KR" altLang="en-US" dirty="0" err="1"/>
+              <a:t>로직처리</a:t>
+            </a:r>
             <a:endParaRPr lang="en-US" altLang="ko-KR" dirty="0"/>
           </a:p>
           <a:p>
+            <a:endParaRPr lang="en-US" altLang="ko-KR" dirty="0"/>
+          </a:p>
+          <a:p>
             <a:endParaRPr lang="ko-KR" altLang="en-US" dirty="0"/>
-          </a:p>
-        </p:txBody>
-      </p:sp>
-      <p:sp>
-        <p:nvSpPr>
-          <p:cNvPr id="4" name="날짜 개체 틀 3">
-            <a:extLst>
-              <a:ext uri="{FF2B5EF4-FFF2-40B4-BE49-F238E27FC236}">
-                <a16:creationId xmlns:a16="http://schemas.microsoft.com/office/drawing/2014/main" id="{91DA9EAE-BE11-0D1C-7875-5C13580DC05A}"/>
-              </a:ext>
-            </a:extLst>
-          </p:cNvPr>
-          <p:cNvSpPr>
-            <a:spLocks noGrp="1"/>
-          </p:cNvSpPr>
-          <p:nvPr>
-            <p:ph type="dt" sz="half" idx="10"/>
-          </p:nvPr>
-        </p:nvSpPr>
-        <p:spPr/>
-        <p:txBody>
-          <a:bodyPr/>
-          <a:lstStyle/>
-          <a:p>
-            <a:fld id="{2EABA43C-120F-4415-98B3-372D2FECC855}" type="datetime1">
-              <a:rPr lang="ko-KR" altLang="en-US" smtClean="0"/>
-              <a:t>2025-09-03</a:t>
-            </a:fld>
-            <a:endParaRPr lang="en-US"/>
           </a:p>
         </p:txBody>
       </p:sp>
       <p:pic>
         <p:nvPicPr>
-          <p:cNvPr id="8" name="그림 7">
+          <p:cNvPr id="6" name="그림 5">
             <a:extLst>
               <a:ext uri="{FF2B5EF4-FFF2-40B4-BE49-F238E27FC236}">
-                <a16:creationId xmlns:a16="http://schemas.microsoft.com/office/drawing/2014/main" id="{BAE70A46-E5A5-E4BA-F11E-982C6411A519}"/>
+                <a16:creationId xmlns:a16="http://schemas.microsoft.com/office/drawing/2014/main" id="{AEA6F64D-C85A-C7BF-B870-228F5D15F95A}"/>
               </a:ext>
             </a:extLst>
           </p:cNvPr>
@@ -11816,38 +11908,8 @@
         </p:blipFill>
         <p:spPr>
           <a:xfrm>
-            <a:off x="5284369" y="3178419"/>
-            <a:ext cx="5840831" cy="257211"/>
-          </a:xfrm>
-          <a:prstGeom prst="rect">
-            <a:avLst/>
-          </a:prstGeom>
-        </p:spPr>
-      </p:pic>
-      <p:pic>
-        <p:nvPicPr>
-          <p:cNvPr id="10" name="그림 9">
-            <a:extLst>
-              <a:ext uri="{FF2B5EF4-FFF2-40B4-BE49-F238E27FC236}">
-                <a16:creationId xmlns:a16="http://schemas.microsoft.com/office/drawing/2014/main" id="{7F95A3BF-78E1-7E64-43BE-A99EFF758BFD}"/>
-              </a:ext>
-            </a:extLst>
-          </p:cNvPr>
-          <p:cNvPicPr>
-            <a:picLocks noChangeAspect="1"/>
-          </p:cNvPicPr>
-          <p:nvPr/>
-        </p:nvPicPr>
-        <p:blipFill>
-          <a:blip r:embed="rId3"/>
-          <a:stretch>
-            <a:fillRect/>
-          </a:stretch>
-        </p:blipFill>
-        <p:spPr>
-          <a:xfrm>
-            <a:off x="5284369" y="3517926"/>
-            <a:ext cx="5840831" cy="2140093"/>
+            <a:off x="6718233" y="2683042"/>
+            <a:ext cx="4253212" cy="3435015"/>
           </a:xfrm>
           <a:prstGeom prst="rect">
             <a:avLst/>
@@ -12685,6 +12747,31 @@
             </a:r>
             <a:r>
               <a:rPr lang="ko-KR" altLang="en-US" dirty="0"/>
+              <a:t>유닛의 이동</a:t>
+            </a:r>
+            <a:r>
+              <a:rPr lang="en-US" altLang="ko-KR" dirty="0"/>
+              <a:t>, </a:t>
+            </a:r>
+            <a:r>
+              <a:rPr lang="ko-KR" altLang="en-US" dirty="0"/>
+              <a:t>플레이어 자원 업데이트 등</a:t>
+            </a:r>
+            <a:r>
+              <a:rPr lang="en-US" altLang="ko-KR" dirty="0"/>
+              <a:t>, </a:t>
+            </a:r>
+          </a:p>
+          <a:p>
+            <a:pPr marL="0" indent="0">
+              <a:buNone/>
+            </a:pPr>
+            <a:r>
+              <a:rPr lang="en-US" altLang="ko-KR" dirty="0"/>
+              <a:t>     </a:t>
+            </a:r>
+            <a:r>
+              <a:rPr lang="ko-KR" altLang="en-US" dirty="0"/>
               <a:t>실제 게임 플레이를 진행하는 상태</a:t>
             </a:r>
             <a:endParaRPr lang="en-US" altLang="ko-KR" dirty="0"/>
@@ -12704,10 +12791,10 @@
       </p:sp>
       <p:pic>
         <p:nvPicPr>
-          <p:cNvPr id="38" name="그림 37">
+          <p:cNvPr id="7" name="그림 6">
             <a:extLst>
               <a:ext uri="{FF2B5EF4-FFF2-40B4-BE49-F238E27FC236}">
-                <a16:creationId xmlns:a16="http://schemas.microsoft.com/office/drawing/2014/main" id="{0481649E-21B9-A559-3F97-60922D9E9C6A}"/>
+                <a16:creationId xmlns:a16="http://schemas.microsoft.com/office/drawing/2014/main" id="{EF8C90BF-38A9-98DD-EE44-B6483F167B07}"/>
               </a:ext>
             </a:extLst>
           </p:cNvPr>
@@ -12724,8 +12811,8 @@
         </p:blipFill>
         <p:spPr>
           <a:xfrm>
-            <a:off x="7032729" y="2273214"/>
-            <a:ext cx="4533930" cy="3754923"/>
+            <a:off x="7333498" y="2314006"/>
+            <a:ext cx="3791702" cy="4076872"/>
           </a:xfrm>
           <a:prstGeom prst="rect">
             <a:avLst/>
@@ -12767,7 +12854,7 @@
           <p:cNvPr id="2" name="제목 1">
             <a:extLst>
               <a:ext uri="{FF2B5EF4-FFF2-40B4-BE49-F238E27FC236}">
-                <a16:creationId xmlns:a16="http://schemas.microsoft.com/office/drawing/2014/main" id="{957E35E5-E488-A22F-CAEB-C029D65E0F05}"/>
+                <a16:creationId xmlns:a16="http://schemas.microsoft.com/office/drawing/2014/main" id="{C72DA812-F3D2-2397-E7ED-CDCB42E3C901}"/>
               </a:ext>
             </a:extLst>
           </p:cNvPr>
@@ -12785,17 +12872,22 @@
           <a:p>
             <a:r>
               <a:rPr lang="ko-KR" altLang="en-US" dirty="0"/>
-              <a:t>단위 테스트</a:t>
-            </a:r>
+              <a:t>유닛 </a:t>
+            </a:r>
+            <a:r>
+              <a:rPr lang="en-US" altLang="ko-KR" dirty="0"/>
+              <a:t>AI</a:t>
+            </a:r>
+            <a:endParaRPr lang="ko-KR" altLang="en-US" dirty="0"/>
           </a:p>
         </p:txBody>
       </p:sp>
       <p:sp>
         <p:nvSpPr>
-          <p:cNvPr id="8" name="내용 개체 틀 7">
+          <p:cNvPr id="3" name="내용 개체 틀 2">
             <a:extLst>
               <a:ext uri="{FF2B5EF4-FFF2-40B4-BE49-F238E27FC236}">
-                <a16:creationId xmlns:a16="http://schemas.microsoft.com/office/drawing/2014/main" id="{0311FD21-9E96-0553-FB5B-59C6E41017AF}"/>
+                <a16:creationId xmlns:a16="http://schemas.microsoft.com/office/drawing/2014/main" id="{69EAC548-3D33-145F-602A-3D0506809C5B}"/>
               </a:ext>
             </a:extLst>
           </p:cNvPr>
@@ -12806,76 +12898,763 @@
             <p:ph idx="1"/>
           </p:nvPr>
         </p:nvSpPr>
-        <p:spPr/>
+        <p:spPr>
+          <a:xfrm>
+            <a:off x="1066800" y="1965290"/>
+            <a:ext cx="10058400" cy="585938"/>
+          </a:xfrm>
+        </p:spPr>
         <p:txBody>
           <a:bodyPr/>
           <a:lstStyle/>
           <a:p>
             <a:r>
               <a:rPr lang="ko-KR" altLang="en-US" dirty="0"/>
-              <a:t>일부 로직의 경우 </a:t>
-            </a:r>
-            <a:r>
-              <a:rPr lang="en-US" altLang="ko-KR" dirty="0" err="1"/>
-              <a:t>Nunit</a:t>
+              <a:t>유닛은 </a:t>
+            </a:r>
+            <a:r>
+              <a:rPr lang="en-US" altLang="ko-KR" dirty="0"/>
+              <a:t>IDLE, MOVING, CHASING, SKILL, DEATH </a:t>
             </a:r>
             <a:r>
               <a:rPr lang="ko-KR" altLang="en-US" dirty="0"/>
-              <a:t>을 이용한 </a:t>
+              <a:t>상태를 갖고 있습니다 </a:t>
             </a:r>
             <a:r>
               <a:rPr lang="en-US" altLang="ko-KR" dirty="0"/>
-              <a:t>Unit</a:t>
+              <a:t>(</a:t>
             </a:r>
             <a:r>
               <a:rPr lang="ko-KR" altLang="en-US" dirty="0"/>
-              <a:t> </a:t>
+              <a:t>타워는 </a:t>
             </a:r>
             <a:r>
               <a:rPr lang="en-US" altLang="ko-KR" dirty="0"/>
-              <a:t>Test</a:t>
+              <a:t>Moving, Chasing</a:t>
             </a:r>
             <a:r>
               <a:rPr lang="ko-KR" altLang="en-US" dirty="0"/>
-              <a:t>를 수행하여 검증</a:t>
-            </a:r>
+              <a:t>이 없는 대신</a:t>
+            </a:r>
+            <a:r>
+              <a:rPr lang="en-US" altLang="ko-KR" dirty="0"/>
+              <a:t> Idle, Attack</a:t>
+            </a:r>
+            <a:r>
+              <a:rPr lang="ko-KR" altLang="en-US" dirty="0"/>
+              <a:t>간 </a:t>
+            </a:r>
+            <a:r>
+              <a:rPr lang="en-US" altLang="ko-KR" dirty="0"/>
+              <a:t>State </a:t>
+            </a:r>
+            <a:r>
+              <a:rPr lang="ko-KR" altLang="en-US" dirty="0"/>
+              <a:t>전환이 가능</a:t>
+            </a:r>
+            <a:r>
+              <a:rPr lang="en-US" altLang="ko-KR" dirty="0"/>
+              <a:t>)</a:t>
+            </a:r>
+            <a:endParaRPr lang="ko-KR" altLang="en-US" dirty="0"/>
           </a:p>
         </p:txBody>
       </p:sp>
-      <p:pic>
-        <p:nvPicPr>
-          <p:cNvPr id="9" name="내용 개체 틀 5">
+      <p:grpSp>
+        <p:nvGrpSpPr>
+          <p:cNvPr id="23" name="그룹 22">
             <a:extLst>
               <a:ext uri="{FF2B5EF4-FFF2-40B4-BE49-F238E27FC236}">
-                <a16:creationId xmlns:a16="http://schemas.microsoft.com/office/drawing/2014/main" id="{F920F87F-C968-BAAE-17A5-990CA19441D3}"/>
+                <a16:creationId xmlns:a16="http://schemas.microsoft.com/office/drawing/2014/main" id="{9CCB8A8A-0827-8EB3-8E67-354A2488CD73}"/>
               </a:ext>
             </a:extLst>
           </p:cNvPr>
-          <p:cNvPicPr>
-            <a:picLocks noChangeAspect="1"/>
-          </p:cNvPicPr>
+          <p:cNvGrpSpPr/>
           <p:nvPr/>
-        </p:nvPicPr>
-        <p:blipFill>
-          <a:blip r:embed="rId2"/>
-          <a:stretch>
-            <a:fillRect/>
-          </a:stretch>
-        </p:blipFill>
+        </p:nvGrpSpPr>
+        <p:grpSpPr>
+          <a:xfrm>
+            <a:off x="1864894" y="2897204"/>
+            <a:ext cx="5132471" cy="2929689"/>
+            <a:chOff x="2580773" y="2947737"/>
+            <a:chExt cx="5132471" cy="2929689"/>
+          </a:xfrm>
+        </p:grpSpPr>
+        <p:sp>
+          <p:nvSpPr>
+            <p:cNvPr id="5" name="직사각형 4">
+              <a:extLst>
+                <a:ext uri="{FF2B5EF4-FFF2-40B4-BE49-F238E27FC236}">
+                  <a16:creationId xmlns:a16="http://schemas.microsoft.com/office/drawing/2014/main" id="{67801C8F-13B3-8ABD-9324-EC3C6C6EB491}"/>
+                </a:ext>
+              </a:extLst>
+            </p:cNvPr>
+            <p:cNvSpPr/>
+            <p:nvPr/>
+          </p:nvSpPr>
+          <p:spPr>
+            <a:xfrm>
+              <a:off x="2580774" y="2947737"/>
+              <a:ext cx="1720515" cy="962526"/>
+            </a:xfrm>
+            <a:prstGeom prst="rect">
+              <a:avLst/>
+            </a:prstGeom>
+          </p:spPr>
+          <p:style>
+            <a:lnRef idx="2">
+              <a:schemeClr val="accent1">
+                <a:shade val="15000"/>
+              </a:schemeClr>
+            </a:lnRef>
+            <a:fillRef idx="1">
+              <a:schemeClr val="accent1"/>
+            </a:fillRef>
+            <a:effectRef idx="0">
+              <a:schemeClr val="accent1"/>
+            </a:effectRef>
+            <a:fontRef idx="minor">
+              <a:schemeClr val="lt1"/>
+            </a:fontRef>
+          </p:style>
+          <p:txBody>
+            <a:bodyPr rtlCol="0" anchor="ctr"/>
+            <a:lstStyle/>
+            <a:p>
+              <a:pPr algn="ctr"/>
+              <a:r>
+                <a:rPr lang="en-US" altLang="ko-KR" dirty="0"/>
+                <a:t>IDLE</a:t>
+              </a:r>
+              <a:endParaRPr lang="ko-KR" altLang="en-US" dirty="0"/>
+            </a:p>
+          </p:txBody>
+        </p:sp>
+        <p:sp>
+          <p:nvSpPr>
+            <p:cNvPr id="6" name="직사각형 5">
+              <a:extLst>
+                <a:ext uri="{FF2B5EF4-FFF2-40B4-BE49-F238E27FC236}">
+                  <a16:creationId xmlns:a16="http://schemas.microsoft.com/office/drawing/2014/main" id="{E45B7A71-0685-B6A2-192F-163155D7AA59}"/>
+                </a:ext>
+              </a:extLst>
+            </p:cNvPr>
+            <p:cNvSpPr/>
+            <p:nvPr/>
+          </p:nvSpPr>
+          <p:spPr>
+            <a:xfrm>
+              <a:off x="5992729" y="2947737"/>
+              <a:ext cx="1720515" cy="962526"/>
+            </a:xfrm>
+            <a:prstGeom prst="rect">
+              <a:avLst/>
+            </a:prstGeom>
+          </p:spPr>
+          <p:style>
+            <a:lnRef idx="2">
+              <a:schemeClr val="accent1">
+                <a:shade val="15000"/>
+              </a:schemeClr>
+            </a:lnRef>
+            <a:fillRef idx="1">
+              <a:schemeClr val="accent1"/>
+            </a:fillRef>
+            <a:effectRef idx="0">
+              <a:schemeClr val="accent1"/>
+            </a:effectRef>
+            <a:fontRef idx="minor">
+              <a:schemeClr val="lt1"/>
+            </a:fontRef>
+          </p:style>
+          <p:txBody>
+            <a:bodyPr rtlCol="0" anchor="ctr"/>
+            <a:lstStyle/>
+            <a:p>
+              <a:pPr algn="ctr"/>
+              <a:r>
+                <a:rPr lang="en-US" altLang="ko-KR" dirty="0"/>
+                <a:t>MOVING</a:t>
+              </a:r>
+              <a:endParaRPr lang="ko-KR" altLang="en-US" dirty="0"/>
+            </a:p>
+          </p:txBody>
+        </p:sp>
+        <p:sp>
+          <p:nvSpPr>
+            <p:cNvPr id="7" name="직사각형 6">
+              <a:extLst>
+                <a:ext uri="{FF2B5EF4-FFF2-40B4-BE49-F238E27FC236}">
+                  <a16:creationId xmlns:a16="http://schemas.microsoft.com/office/drawing/2014/main" id="{0AF8122E-7E7A-6AB9-012F-6A59F537C1DF}"/>
+                </a:ext>
+              </a:extLst>
+            </p:cNvPr>
+            <p:cNvSpPr/>
+            <p:nvPr/>
+          </p:nvSpPr>
+          <p:spPr>
+            <a:xfrm>
+              <a:off x="2580773" y="4914900"/>
+              <a:ext cx="1720515" cy="962526"/>
+            </a:xfrm>
+            <a:prstGeom prst="rect">
+              <a:avLst/>
+            </a:prstGeom>
+          </p:spPr>
+          <p:style>
+            <a:lnRef idx="2">
+              <a:schemeClr val="accent1">
+                <a:shade val="15000"/>
+              </a:schemeClr>
+            </a:lnRef>
+            <a:fillRef idx="1">
+              <a:schemeClr val="accent1"/>
+            </a:fillRef>
+            <a:effectRef idx="0">
+              <a:schemeClr val="accent1"/>
+            </a:effectRef>
+            <a:fontRef idx="minor">
+              <a:schemeClr val="lt1"/>
+            </a:fontRef>
+          </p:style>
+          <p:txBody>
+            <a:bodyPr rtlCol="0" anchor="ctr"/>
+            <a:lstStyle/>
+            <a:p>
+              <a:pPr algn="ctr"/>
+              <a:r>
+                <a:rPr lang="en-US" altLang="ko-KR" dirty="0"/>
+                <a:t>CHASING</a:t>
+              </a:r>
+              <a:endParaRPr lang="ko-KR" altLang="en-US" dirty="0"/>
+            </a:p>
+          </p:txBody>
+        </p:sp>
+        <p:sp>
+          <p:nvSpPr>
+            <p:cNvPr id="10" name="직사각형 9">
+              <a:extLst>
+                <a:ext uri="{FF2B5EF4-FFF2-40B4-BE49-F238E27FC236}">
+                  <a16:creationId xmlns:a16="http://schemas.microsoft.com/office/drawing/2014/main" id="{80B3A5C1-7258-9A2E-6DC9-66564A590093}"/>
+                </a:ext>
+              </a:extLst>
+            </p:cNvPr>
+            <p:cNvSpPr/>
+            <p:nvPr/>
+          </p:nvSpPr>
+          <p:spPr>
+            <a:xfrm>
+              <a:off x="5992729" y="4914900"/>
+              <a:ext cx="1720515" cy="962526"/>
+            </a:xfrm>
+            <a:prstGeom prst="rect">
+              <a:avLst/>
+            </a:prstGeom>
+          </p:spPr>
+          <p:style>
+            <a:lnRef idx="2">
+              <a:schemeClr val="accent1">
+                <a:shade val="15000"/>
+              </a:schemeClr>
+            </a:lnRef>
+            <a:fillRef idx="1">
+              <a:schemeClr val="accent1"/>
+            </a:fillRef>
+            <a:effectRef idx="0">
+              <a:schemeClr val="accent1"/>
+            </a:effectRef>
+            <a:fontRef idx="minor">
+              <a:schemeClr val="lt1"/>
+            </a:fontRef>
+          </p:style>
+          <p:txBody>
+            <a:bodyPr rtlCol="0" anchor="ctr"/>
+            <a:lstStyle/>
+            <a:p>
+              <a:pPr algn="ctr"/>
+              <a:r>
+                <a:rPr lang="en-US" altLang="ko-KR" dirty="0"/>
+                <a:t>Attack</a:t>
+              </a:r>
+              <a:endParaRPr lang="ko-KR" altLang="en-US" dirty="0"/>
+            </a:p>
+          </p:txBody>
+        </p:sp>
+        <p:cxnSp>
+          <p:nvCxnSpPr>
+            <p:cNvPr id="12" name="직선 화살표 연결선 11">
+              <a:extLst>
+                <a:ext uri="{FF2B5EF4-FFF2-40B4-BE49-F238E27FC236}">
+                  <a16:creationId xmlns:a16="http://schemas.microsoft.com/office/drawing/2014/main" id="{D9FF099E-EB95-7766-B733-4C39041C285C}"/>
+                </a:ext>
+              </a:extLst>
+            </p:cNvPr>
+            <p:cNvCxnSpPr/>
+            <p:nvPr/>
+          </p:nvCxnSpPr>
+          <p:spPr>
+            <a:xfrm>
+              <a:off x="4301288" y="3248526"/>
+              <a:ext cx="1691441" cy="0"/>
+            </a:xfrm>
+            <a:prstGeom prst="straightConnector1">
+              <a:avLst/>
+            </a:prstGeom>
+            <a:ln>
+              <a:tailEnd type="triangle"/>
+            </a:ln>
+          </p:spPr>
+          <p:style>
+            <a:lnRef idx="1">
+              <a:schemeClr val="dk1"/>
+            </a:lnRef>
+            <a:fillRef idx="0">
+              <a:schemeClr val="dk1"/>
+            </a:fillRef>
+            <a:effectRef idx="0">
+              <a:schemeClr val="dk1"/>
+            </a:effectRef>
+            <a:fontRef idx="minor">
+              <a:schemeClr val="tx1"/>
+            </a:fontRef>
+          </p:style>
+        </p:cxnSp>
+        <p:cxnSp>
+          <p:nvCxnSpPr>
+            <p:cNvPr id="16" name="직선 화살표 연결선 15">
+              <a:extLst>
+                <a:ext uri="{FF2B5EF4-FFF2-40B4-BE49-F238E27FC236}">
+                  <a16:creationId xmlns:a16="http://schemas.microsoft.com/office/drawing/2014/main" id="{045FB17A-97B3-BE52-9F7C-132DE1EE425B}"/>
+                </a:ext>
+              </a:extLst>
+            </p:cNvPr>
+            <p:cNvCxnSpPr/>
+            <p:nvPr/>
+          </p:nvCxnSpPr>
+          <p:spPr>
+            <a:xfrm flipH="1">
+              <a:off x="3561347" y="3651584"/>
+              <a:ext cx="2431382" cy="1263316"/>
+            </a:xfrm>
+            <a:prstGeom prst="straightConnector1">
+              <a:avLst/>
+            </a:prstGeom>
+            <a:ln>
+              <a:tailEnd type="triangle"/>
+            </a:ln>
+          </p:spPr>
+          <p:style>
+            <a:lnRef idx="1">
+              <a:schemeClr val="dk1"/>
+            </a:lnRef>
+            <a:fillRef idx="0">
+              <a:schemeClr val="dk1"/>
+            </a:fillRef>
+            <a:effectRef idx="0">
+              <a:schemeClr val="dk1"/>
+            </a:effectRef>
+            <a:fontRef idx="minor">
+              <a:schemeClr val="tx1"/>
+            </a:fontRef>
+          </p:style>
+        </p:cxnSp>
+        <p:cxnSp>
+          <p:nvCxnSpPr>
+            <p:cNvPr id="18" name="직선 화살표 연결선 17">
+              <a:extLst>
+                <a:ext uri="{FF2B5EF4-FFF2-40B4-BE49-F238E27FC236}">
+                  <a16:creationId xmlns:a16="http://schemas.microsoft.com/office/drawing/2014/main" id="{28DFA1C4-5143-EF8E-CE11-CF903C048E9A}"/>
+                </a:ext>
+              </a:extLst>
+            </p:cNvPr>
+            <p:cNvCxnSpPr>
+              <a:cxnSpLocks/>
+              <a:endCxn id="6" idx="1"/>
+            </p:cNvCxnSpPr>
+            <p:nvPr/>
+          </p:nvCxnSpPr>
+          <p:spPr>
+            <a:xfrm flipV="1">
+              <a:off x="3075821" y="3429000"/>
+              <a:ext cx="2916908" cy="1462109"/>
+            </a:xfrm>
+            <a:prstGeom prst="straightConnector1">
+              <a:avLst/>
+            </a:prstGeom>
+            <a:ln>
+              <a:tailEnd type="triangle"/>
+            </a:ln>
+          </p:spPr>
+          <p:style>
+            <a:lnRef idx="1">
+              <a:schemeClr val="dk1"/>
+            </a:lnRef>
+            <a:fillRef idx="0">
+              <a:schemeClr val="dk1"/>
+            </a:fillRef>
+            <a:effectRef idx="0">
+              <a:schemeClr val="dk1"/>
+            </a:effectRef>
+            <a:fontRef idx="minor">
+              <a:schemeClr val="tx1"/>
+            </a:fontRef>
+          </p:style>
+        </p:cxnSp>
+        <p:cxnSp>
+          <p:nvCxnSpPr>
+            <p:cNvPr id="20" name="직선 화살표 연결선 19">
+              <a:extLst>
+                <a:ext uri="{FF2B5EF4-FFF2-40B4-BE49-F238E27FC236}">
+                  <a16:creationId xmlns:a16="http://schemas.microsoft.com/office/drawing/2014/main" id="{836A373C-4BDB-E7B0-D82D-ABD1F3EF3641}"/>
+                </a:ext>
+              </a:extLst>
+            </p:cNvPr>
+            <p:cNvCxnSpPr/>
+            <p:nvPr/>
+          </p:nvCxnSpPr>
+          <p:spPr>
+            <a:xfrm>
+              <a:off x="4301288" y="5131468"/>
+              <a:ext cx="1691441" cy="0"/>
+            </a:xfrm>
+            <a:prstGeom prst="straightConnector1">
+              <a:avLst/>
+            </a:prstGeom>
+            <a:ln>
+              <a:tailEnd type="triangle"/>
+            </a:ln>
+          </p:spPr>
+          <p:style>
+            <a:lnRef idx="1">
+              <a:schemeClr val="dk1"/>
+            </a:lnRef>
+            <a:fillRef idx="0">
+              <a:schemeClr val="dk1"/>
+            </a:fillRef>
+            <a:effectRef idx="0">
+              <a:schemeClr val="dk1"/>
+            </a:effectRef>
+            <a:fontRef idx="minor">
+              <a:schemeClr val="tx1"/>
+            </a:fontRef>
+          </p:style>
+        </p:cxnSp>
+      </p:grpSp>
+      <p:sp>
+        <p:nvSpPr>
+          <p:cNvPr id="24" name="TextBox 23">
+            <a:extLst>
+              <a:ext uri="{FF2B5EF4-FFF2-40B4-BE49-F238E27FC236}">
+                <a16:creationId xmlns:a16="http://schemas.microsoft.com/office/drawing/2014/main" id="{C7A98B6E-BA0E-D6EA-DA24-BEF88CA34ABD}"/>
+              </a:ext>
+            </a:extLst>
+          </p:cNvPr>
+          <p:cNvSpPr txBox="1"/>
+          <p:nvPr/>
+        </p:nvSpPr>
         <p:spPr>
           <a:xfrm>
-            <a:off x="1208087" y="2474241"/>
-            <a:ext cx="5874388" cy="3849687"/>
+            <a:off x="4208545" y="4059316"/>
+            <a:ext cx="2366713" cy="276999"/>
+          </a:xfrm>
+          <a:prstGeom prst="rect">
+            <a:avLst/>
+          </a:prstGeom>
+          <a:noFill/>
+        </p:spPr>
+        <p:txBody>
+          <a:bodyPr wrap="square" rtlCol="0">
+            <a:spAutoFit/>
+          </a:bodyPr>
+          <a:lstStyle/>
+          <a:p>
+            <a:r>
+              <a:rPr lang="ko-KR" altLang="en-US" sz="1200" dirty="0"/>
+              <a:t>거리가 </a:t>
+            </a:r>
+            <a:r>
+              <a:rPr lang="en-US" altLang="ko-KR" sz="1200" dirty="0"/>
+              <a:t>Sight</a:t>
+            </a:r>
+            <a:r>
+              <a:rPr lang="ko-KR" altLang="en-US" sz="1200" dirty="0"/>
+              <a:t> 이내일때</a:t>
+            </a:r>
+          </a:p>
+        </p:txBody>
+      </p:sp>
+      <p:sp>
+        <p:nvSpPr>
+          <p:cNvPr id="25" name="TextBox 24">
+            <a:extLst>
+              <a:ext uri="{FF2B5EF4-FFF2-40B4-BE49-F238E27FC236}">
+                <a16:creationId xmlns:a16="http://schemas.microsoft.com/office/drawing/2014/main" id="{DA710294-3D2E-52A0-344C-7713B8E5C791}"/>
+              </a:ext>
+            </a:extLst>
+          </p:cNvPr>
+          <p:cNvSpPr txBox="1"/>
+          <p:nvPr/>
+        </p:nvSpPr>
+        <p:spPr>
+          <a:xfrm>
+            <a:off x="3614482" y="4666727"/>
+            <a:ext cx="1691442" cy="461665"/>
+          </a:xfrm>
+          <a:prstGeom prst="rect">
+            <a:avLst/>
+          </a:prstGeom>
+          <a:noFill/>
+        </p:spPr>
+        <p:txBody>
+          <a:bodyPr wrap="square" rtlCol="0">
+            <a:spAutoFit/>
+          </a:bodyPr>
+          <a:lstStyle/>
+          <a:p>
+            <a:r>
+              <a:rPr lang="ko-KR" altLang="en-US" sz="1200" dirty="0"/>
+              <a:t>거리가 </a:t>
+            </a:r>
+            <a:r>
+              <a:rPr lang="en-US" altLang="ko-KR" sz="1200" dirty="0" err="1"/>
+              <a:t>AttackRange</a:t>
+            </a:r>
+            <a:r>
+              <a:rPr lang="ko-KR" altLang="en-US" sz="1200" dirty="0"/>
+              <a:t> 이내일때</a:t>
+            </a:r>
+          </a:p>
+        </p:txBody>
+      </p:sp>
+      <p:sp>
+        <p:nvSpPr>
+          <p:cNvPr id="26" name="TextBox 25">
+            <a:extLst>
+              <a:ext uri="{FF2B5EF4-FFF2-40B4-BE49-F238E27FC236}">
+                <a16:creationId xmlns:a16="http://schemas.microsoft.com/office/drawing/2014/main" id="{DFF2752B-008E-C24E-88E1-2AF5A126CA6D}"/>
+              </a:ext>
+            </a:extLst>
+          </p:cNvPr>
+          <p:cNvSpPr txBox="1"/>
+          <p:nvPr/>
+        </p:nvSpPr>
+        <p:spPr>
+          <a:xfrm>
+            <a:off x="3649076" y="2910438"/>
+            <a:ext cx="2366713" cy="276999"/>
+          </a:xfrm>
+          <a:prstGeom prst="rect">
+            <a:avLst/>
+          </a:prstGeom>
+          <a:noFill/>
+        </p:spPr>
+        <p:txBody>
+          <a:bodyPr wrap="square" rtlCol="0">
+            <a:spAutoFit/>
+          </a:bodyPr>
+          <a:lstStyle/>
+          <a:p>
+            <a:r>
+              <a:rPr lang="ko-KR" altLang="en-US" sz="1200" dirty="0"/>
+              <a:t>자동으로 상태전환</a:t>
+            </a:r>
+          </a:p>
+        </p:txBody>
+      </p:sp>
+      <p:sp>
+        <p:nvSpPr>
+          <p:cNvPr id="28" name="TextBox 27">
+            <a:extLst>
+              <a:ext uri="{FF2B5EF4-FFF2-40B4-BE49-F238E27FC236}">
+                <a16:creationId xmlns:a16="http://schemas.microsoft.com/office/drawing/2014/main" id="{FA5C0F27-81F2-8E7D-A3E5-65317F340533}"/>
+              </a:ext>
+            </a:extLst>
+          </p:cNvPr>
+          <p:cNvSpPr txBox="1"/>
+          <p:nvPr/>
+        </p:nvSpPr>
+        <p:spPr>
+          <a:xfrm>
+            <a:off x="2062410" y="4119320"/>
+            <a:ext cx="1027700" cy="461665"/>
+          </a:xfrm>
+          <a:prstGeom prst="rect">
+            <a:avLst/>
+          </a:prstGeom>
+          <a:noFill/>
+        </p:spPr>
+        <p:txBody>
+          <a:bodyPr wrap="square" rtlCol="0">
+            <a:spAutoFit/>
+          </a:bodyPr>
+          <a:lstStyle/>
+          <a:p>
+            <a:r>
+              <a:rPr lang="en-US" altLang="ko-KR" sz="1200" dirty="0"/>
+              <a:t>Sight </a:t>
+            </a:r>
+            <a:r>
+              <a:rPr lang="ko-KR" altLang="en-US" sz="1200" dirty="0" err="1"/>
+              <a:t>범위밖일때</a:t>
+            </a:r>
+            <a:endParaRPr lang="ko-KR" altLang="en-US" sz="1200" dirty="0"/>
+          </a:p>
+        </p:txBody>
+      </p:sp>
+      <p:sp>
+        <p:nvSpPr>
+          <p:cNvPr id="30" name="직사각형 29">
+            <a:extLst>
+              <a:ext uri="{FF2B5EF4-FFF2-40B4-BE49-F238E27FC236}">
+                <a16:creationId xmlns:a16="http://schemas.microsoft.com/office/drawing/2014/main" id="{964BD41D-298D-49E8-7A78-8FDB9A71D792}"/>
+              </a:ext>
+            </a:extLst>
+          </p:cNvPr>
+          <p:cNvSpPr/>
+          <p:nvPr/>
+        </p:nvSpPr>
+        <p:spPr>
+          <a:xfrm>
+            <a:off x="7513721" y="3937935"/>
+            <a:ext cx="1832811" cy="826570"/>
           </a:xfrm>
           <a:prstGeom prst="rect">
             <a:avLst/>
           </a:prstGeom>
         </p:spPr>
-      </p:pic>
+        <p:style>
+          <a:lnRef idx="2">
+            <a:schemeClr val="accent1">
+              <a:shade val="15000"/>
+            </a:schemeClr>
+          </a:lnRef>
+          <a:fillRef idx="1">
+            <a:schemeClr val="accent1"/>
+          </a:fillRef>
+          <a:effectRef idx="0">
+            <a:schemeClr val="accent1"/>
+          </a:effectRef>
+          <a:fontRef idx="minor">
+            <a:schemeClr val="lt1"/>
+          </a:fontRef>
+        </p:style>
+        <p:txBody>
+          <a:bodyPr rtlCol="0" anchor="ctr"/>
+          <a:lstStyle/>
+          <a:p>
+            <a:pPr algn="ctr"/>
+            <a:r>
+              <a:rPr lang="en-US" altLang="ko-KR" dirty="0"/>
+              <a:t>DEATH</a:t>
+            </a:r>
+          </a:p>
+          <a:p>
+            <a:pPr algn="ctr"/>
+            <a:r>
+              <a:rPr lang="en-US" altLang="ko-KR" dirty="0"/>
+              <a:t>(hp &lt;= 0</a:t>
+            </a:r>
+            <a:r>
+              <a:rPr lang="ko-KR" altLang="en-US" dirty="0" err="1"/>
+              <a:t>일때</a:t>
+            </a:r>
+            <a:r>
+              <a:rPr lang="en-US" altLang="ko-KR" dirty="0"/>
+              <a:t>)</a:t>
+            </a:r>
+            <a:endParaRPr lang="ko-KR" altLang="en-US" dirty="0"/>
+          </a:p>
+        </p:txBody>
+      </p:sp>
+      <p:sp>
+        <p:nvSpPr>
+          <p:cNvPr id="17" name="TextBox 16">
+            <a:extLst>
+              <a:ext uri="{FF2B5EF4-FFF2-40B4-BE49-F238E27FC236}">
+                <a16:creationId xmlns:a16="http://schemas.microsoft.com/office/drawing/2014/main" id="{22138CDC-E22C-BAE6-A9FE-1219969BEA59}"/>
+              </a:ext>
+            </a:extLst>
+          </p:cNvPr>
+          <p:cNvSpPr txBox="1"/>
+          <p:nvPr/>
+        </p:nvSpPr>
+        <p:spPr>
+          <a:xfrm>
+            <a:off x="3585409" y="5487735"/>
+            <a:ext cx="1217951" cy="461665"/>
+          </a:xfrm>
+          <a:prstGeom prst="rect">
+            <a:avLst/>
+          </a:prstGeom>
+          <a:noFill/>
+        </p:spPr>
+        <p:txBody>
+          <a:bodyPr wrap="square" rtlCol="0">
+            <a:spAutoFit/>
+          </a:bodyPr>
+          <a:lstStyle/>
+          <a:p>
+            <a:r>
+              <a:rPr lang="en-US" altLang="ko-KR" sz="1200" dirty="0" err="1"/>
+              <a:t>AttackRange</a:t>
+            </a:r>
+            <a:r>
+              <a:rPr lang="en-US" altLang="ko-KR" sz="1200" dirty="0"/>
+              <a:t> </a:t>
+            </a:r>
+            <a:r>
+              <a:rPr lang="ko-KR" altLang="en-US" sz="1200" dirty="0" err="1"/>
+              <a:t>범위밖일때</a:t>
+            </a:r>
+            <a:endParaRPr lang="ko-KR" altLang="en-US" sz="1200" dirty="0"/>
+          </a:p>
+        </p:txBody>
+      </p:sp>
+      <p:cxnSp>
+        <p:nvCxnSpPr>
+          <p:cNvPr id="19" name="직선 화살표 연결선 18">
+            <a:extLst>
+              <a:ext uri="{FF2B5EF4-FFF2-40B4-BE49-F238E27FC236}">
+                <a16:creationId xmlns:a16="http://schemas.microsoft.com/office/drawing/2014/main" id="{808183F8-BE5D-3BB0-4D7B-8F76A4038937}"/>
+              </a:ext>
+            </a:extLst>
+          </p:cNvPr>
+          <p:cNvCxnSpPr>
+            <a:cxnSpLocks/>
+          </p:cNvCxnSpPr>
+          <p:nvPr/>
+        </p:nvCxnSpPr>
+        <p:spPr>
+          <a:xfrm flipH="1">
+            <a:off x="3585409" y="5474368"/>
+            <a:ext cx="1691441" cy="0"/>
+          </a:xfrm>
+          <a:prstGeom prst="straightConnector1">
+            <a:avLst/>
+          </a:prstGeom>
+          <a:ln>
+            <a:tailEnd type="triangle"/>
+          </a:ln>
+        </p:spPr>
+        <p:style>
+          <a:lnRef idx="1">
+            <a:schemeClr val="dk1"/>
+          </a:lnRef>
+          <a:fillRef idx="0">
+            <a:schemeClr val="dk1"/>
+          </a:fillRef>
+          <a:effectRef idx="0">
+            <a:schemeClr val="dk1"/>
+          </a:effectRef>
+          <a:fontRef idx="minor">
+            <a:schemeClr val="tx1"/>
+          </a:fontRef>
+        </p:style>
+      </p:cxnSp>
     </p:spTree>
     <p:extLst>
       <p:ext uri="{BB962C8B-B14F-4D97-AF65-F5344CB8AC3E}">
-        <p14:creationId xmlns:p14="http://schemas.microsoft.com/office/powerpoint/2010/main" val="1125125135"/>
+        <p14:creationId xmlns:p14="http://schemas.microsoft.com/office/powerpoint/2010/main" val="2594855001"/>
       </p:ext>
     </p:extLst>
   </p:cSld>
